--- a/docs/business/proposals/urdeal-influencer-deck.pptx
+++ b/docs/business/proposals/urdeal-influencer-deck.pptx
@@ -689,7 +689,7 @@
           <a:p>
             <a:r>
               <a:rPr lang="en-US" dirty="0"/>
-              <a:t>정직 고지: 09-13 실측(활성 337, 실제 매장 1, 인플루언서 딜 지급 0). FAQ 는 기존 9장 HTML 에서 옮기고 "딜 없으면 0" 항목 추가.</a:t>
+              <a:t>09-14: 정직 고지 블록 제거(대표 — 사장님 덱과 같은 판단). FAQ 6 개를 크게.</a:t>
             </a:r>
             <a:endParaRPr lang="en-US" dirty="0"/>
           </a:p>
@@ -2407,45 +2407,6 @@
           </a:prstGeom>
         </p:spPr>
       </p:pic>
-      <p:sp>
-        <p:nvSpPr>
-          <p:cNvPr id="14" name="Text 10"/>
-          <p:cNvSpPr txBox="1"/>
-          <p:nvPr/>
-        </p:nvSpPr>
-        <p:spPr>
-          <a:xfrm>
-            <a:off x="685800" y="896112"/>
-            <a:ext cx="5486400" cy="228600"/>
-          </a:xfrm>
-          <a:prstGeom prst="rect">
-            <a:avLst/>
-          </a:prstGeom>
-          <a:noFill/>
-          <a:ln/>
-        </p:spPr>
-        <p:txBody>
-          <a:bodyPr wrap="square" lIns="0" tIns="0" rIns="0" bIns="0" rtlCol="0" anchor="ctr"/>
-          <a:lstStyle/>
-          <a:p>
-            <a:pPr indent="0" marL="0">
-              <a:buNone/>
-            </a:pPr>
-            <a:r>
-              <a:rPr lang="en-US" sz="1000" spc="50" kern="0" dirty="0">
-                <a:solidFill>
-                  <a:srgbClr val="A9A6A2"/>
-                </a:solidFill>
-                <a:latin typeface="Pretendard" pitchFamily="34" charset="0"/>
-                <a:ea typeface="Pretendard" pitchFamily="34" charset="-122"/>
-                <a:cs typeface="Pretendard" pitchFamily="34" charset="-120"/>
-              </a:rPr>
-              <a:t>인플루언서 제휴 소개 · 2026-09-13</a:t>
-            </a:r>
-            <a:endParaRPr lang="en-US" sz="1000" dirty="0"/>
-          </a:p>
-        </p:txBody>
-      </p:sp>
     </p:spTree>
   </p:cSld>
   <p:clrMapOvr>
@@ -3677,126 +3638,60 @@
       </p:sp>
       <p:sp>
         <p:nvSpPr>
-          <p:cNvPr id="6" name="Shape 3"/>
+          <p:cNvPr id="6" name="Text 3"/>
+          <p:cNvSpPr txBox="1"/>
+          <p:nvPr/>
+        </p:nvSpPr>
+        <p:spPr>
+          <a:xfrm>
+            <a:off x="685800" y="1828800"/>
+            <a:ext cx="10820095" cy="548640"/>
+          </a:xfrm>
+          <a:prstGeom prst="rect">
+            <a:avLst/>
+          </a:prstGeom>
+          <a:noFill/>
+          <a:ln/>
+        </p:spPr>
+        <p:txBody>
+          <a:bodyPr wrap="square" lIns="0" tIns="0" rIns="0" bIns="0" rtlCol="0" anchor="t"/>
+          <a:lstStyle/>
+          <a:p>
+            <a:pPr indent="0" marL="0">
+              <a:lnSpc>
+                <a:spcPct val="150000"/>
+              </a:lnSpc>
+              <a:buNone/>
+            </a:pPr>
+            <a:r>
+              <a:rPr lang="en-US" sz="1250" dirty="0">
+                <a:solidFill>
+                  <a:srgbClr val="6E6B68"/>
+                </a:solidFill>
+                <a:latin typeface="Pretendard" pitchFamily="34" charset="0"/>
+                <a:ea typeface="Pretendard" pitchFamily="34" charset="-122"/>
+                <a:cs typeface="Pretendard" pitchFamily="34" charset="-120"/>
+              </a:rPr>
+              <a:t>캠페인이 끝나도 내 유어샵과 링크는 그대로 남고, 매장과 맺은 딜은 계속 쌓입니다. 자주 묻는 질문에 먼저 답해 두었습니다.</a:t>
+            </a:r>
+            <a:endParaRPr lang="en-US" sz="1250" dirty="0"/>
+          </a:p>
+        </p:txBody>
+      </p:sp>
+      <p:sp>
+        <p:nvSpPr>
+          <p:cNvPr id="7" name="Shape 4"/>
           <p:cNvSpPr/>
           <p:nvPr/>
         </p:nvSpPr>
         <p:spPr>
           <a:xfrm>
-            <a:off x="685800" y="1965960"/>
-            <a:ext cx="10820095" cy="1417320"/>
+            <a:off x="685800" y="2560320"/>
+            <a:ext cx="3454298" cy="1600200"/>
           </a:xfrm>
           <a:prstGeom prst="roundRect">
             <a:avLst>
-              <a:gd name="adj" fmla="val 9032"/>
-            </a:avLst>
-          </a:prstGeom>
-          <a:solidFill>
-            <a:srgbClr val="EEF3FE"/>
-          </a:solidFill>
-          <a:ln w="12700">
-            <a:solidFill>
-              <a:srgbClr val="EEF3FE"/>
-            </a:solidFill>
-            <a:prstDash val="solid"/>
-          </a:ln>
-        </p:spPr>
-      </p:sp>
-      <p:sp>
-        <p:nvSpPr>
-          <p:cNvPr id="7" name="Text 4"/>
-          <p:cNvSpPr txBox="1"/>
-          <p:nvPr/>
-        </p:nvSpPr>
-        <p:spPr>
-          <a:xfrm>
-            <a:off x="960120" y="2130552"/>
-            <a:ext cx="10271455" cy="274320"/>
-          </a:xfrm>
-          <a:prstGeom prst="rect">
-            <a:avLst/>
-          </a:prstGeom>
-          <a:noFill/>
-          <a:ln/>
-        </p:spPr>
-        <p:txBody>
-          <a:bodyPr wrap="square" lIns="0" tIns="0" rIns="0" bIns="0" rtlCol="0" anchor="ctr"/>
-          <a:lstStyle/>
-          <a:p>
-            <a:pPr indent="0" marL="0">
-              <a:buNone/>
-            </a:pPr>
-            <a:r>
-              <a:rPr lang="en-US" sz="1250" b="1" spc="-30" kern="0" dirty="0">
-                <a:solidFill>
-                  <a:srgbClr val="16181C"/>
-                </a:solidFill>
-                <a:latin typeface="Pretendard" pitchFamily="34" charset="0"/>
-                <a:ea typeface="Pretendard" pitchFamily="34" charset="-122"/>
-                <a:cs typeface="Pretendard" pitchFamily="34" charset="-120"/>
-              </a:rPr>
-              <a:t>정직하게 말씀드립니다</a:t>
-            </a:r>
-            <a:endParaRPr lang="en-US" sz="1250" dirty="0"/>
-          </a:p>
-        </p:txBody>
-      </p:sp>
-      <p:sp>
-        <p:nvSpPr>
-          <p:cNvPr id="8" name="Text 5"/>
-          <p:cNvSpPr txBox="1"/>
-          <p:nvPr/>
-        </p:nvSpPr>
-        <p:spPr>
-          <a:xfrm>
-            <a:off x="960120" y="2441448"/>
-            <a:ext cx="10271455" cy="850392"/>
-          </a:xfrm>
-          <a:prstGeom prst="rect">
-            <a:avLst/>
-          </a:prstGeom>
-          <a:noFill/>
-          <a:ln/>
-        </p:spPr>
-        <p:txBody>
-          <a:bodyPr wrap="square" lIns="0" tIns="0" rIns="0" bIns="0" rtlCol="0" anchor="t"/>
-          <a:lstStyle/>
-          <a:p>
-            <a:pPr indent="0" marL="0">
-              <a:lnSpc>
-                <a:spcPct val="145000"/>
-              </a:lnSpc>
-              <a:buNone/>
-            </a:pPr>
-            <a:r>
-              <a:rPr lang="en-US" sz="1050" dirty="0">
-                <a:solidFill>
-                  <a:srgbClr val="16181C"/>
-                </a:solidFill>
-                <a:latin typeface="Pretendard" pitchFamily="34" charset="0"/>
-                <a:ea typeface="Pretendard" pitchFamily="34" charset="-122"/>
-                <a:cs typeface="Pretendard" pitchFamily="34" charset="-120"/>
-              </a:rPr>
-              <a:t>유어딜은 초기 서비스입니다. 2026-09-13 기준 판매 중인 이용권 337건 가운데 실제 매장이 등록한 것은 1건이고, 매장이 제안한 딜로 소개비가 지급된 건은 아직 없습니다. 트래픽을 약속하는 대신 조건과 정산 방식을 숫자로 먼저 공개합니다. 비어 있는 지역과 카테고리는 먼저 들어온 채널이 가져갑니다.</a:t>
-            </a:r>
-            <a:endParaRPr lang="en-US" sz="1050" dirty="0"/>
-          </a:p>
-        </p:txBody>
-      </p:sp>
-      <p:sp>
-        <p:nvSpPr>
-          <p:cNvPr id="9" name="Shape 6"/>
-          <p:cNvSpPr/>
-          <p:nvPr/>
-        </p:nvSpPr>
-        <p:spPr>
-          <a:xfrm>
-            <a:off x="685800" y="3657600"/>
-            <a:ext cx="3454298" cy="1161288"/>
-          </a:xfrm>
-          <a:prstGeom prst="roundRect">
-            <a:avLst>
-              <a:gd name="adj" fmla="val 11024"/>
+              <a:gd name="adj" fmla="val 8000"/>
             </a:avLst>
           </a:prstGeom>
           <a:solidFill>
@@ -3819,30 +3714,30 @@
       </p:sp>
       <p:sp>
         <p:nvSpPr>
-          <p:cNvPr id="10" name="Text 7"/>
-          <p:cNvSpPr txBox="1"/>
-          <p:nvPr/>
-        </p:nvSpPr>
-        <p:spPr>
-          <a:xfrm>
-            <a:off x="923544" y="3803904"/>
-            <a:ext cx="2978810" cy="256032"/>
-          </a:xfrm>
-          <a:prstGeom prst="rect">
-            <a:avLst/>
-          </a:prstGeom>
-          <a:noFill/>
-          <a:ln/>
-        </p:spPr>
-        <p:txBody>
-          <a:bodyPr wrap="square" lIns="0" tIns="0" rIns="0" bIns="0" rtlCol="0" anchor="ctr"/>
-          <a:lstStyle/>
-          <a:p>
-            <a:pPr indent="0" marL="0">
-              <a:buNone/>
-            </a:pPr>
-            <a:r>
-              <a:rPr lang="en-US" sz="1150" b="1" spc="-30" kern="0" dirty="0">
+          <p:cNvPr id="8" name="Text 5"/>
+          <p:cNvSpPr txBox="1"/>
+          <p:nvPr/>
+        </p:nvSpPr>
+        <p:spPr>
+          <a:xfrm>
+            <a:off x="960120" y="2779776"/>
+            <a:ext cx="2905658" cy="274320"/>
+          </a:xfrm>
+          <a:prstGeom prst="rect">
+            <a:avLst/>
+          </a:prstGeom>
+          <a:noFill/>
+          <a:ln/>
+        </p:spPr>
+        <p:txBody>
+          <a:bodyPr wrap="square" lIns="0" tIns="0" rIns="0" bIns="0" rtlCol="0" anchor="ctr"/>
+          <a:lstStyle/>
+          <a:p>
+            <a:pPr indent="0" marL="0">
+              <a:buNone/>
+            </a:pPr>
+            <a:r>
+              <a:rPr lang="en-US" sz="1250" b="1" spc="-30" kern="0" dirty="0">
                 <a:solidFill>
                   <a:srgbClr val="16181C"/>
                 </a:solidFill>
@@ -3852,20 +3747,20 @@
               </a:rPr>
               <a:t>팔로워가 적어도 되나요?</a:t>
             </a:r>
-            <a:endParaRPr lang="en-US" sz="1150" dirty="0"/>
-          </a:p>
-        </p:txBody>
-      </p:sp>
-      <p:sp>
-        <p:nvSpPr>
-          <p:cNvPr id="11" name="Text 8"/>
-          <p:cNvSpPr txBox="1"/>
-          <p:nvPr/>
-        </p:nvSpPr>
-        <p:spPr>
-          <a:xfrm>
-            <a:off x="923544" y="4087368"/>
-            <a:ext cx="2978810" cy="694944"/>
+            <a:endParaRPr lang="en-US" sz="1250" dirty="0"/>
+          </a:p>
+        </p:txBody>
+      </p:sp>
+      <p:sp>
+        <p:nvSpPr>
+          <p:cNvPr id="9" name="Text 6"/>
+          <p:cNvSpPr txBox="1"/>
+          <p:nvPr/>
+        </p:nvSpPr>
+        <p:spPr>
+          <a:xfrm>
+            <a:off x="960120" y="3127248"/>
+            <a:ext cx="2905658" cy="960120"/>
           </a:xfrm>
           <a:prstGeom prst="rect">
             <a:avLst/>
@@ -3879,12 +3774,12 @@
           <a:p>
             <a:pPr indent="0" marL="0">
               <a:lnSpc>
-                <a:spcPct val="136000"/>
+                <a:spcPct val="142000"/>
               </a:lnSpc>
               <a:buNone/>
             </a:pPr>
             <a:r>
-              <a:rPr lang="en-US" sz="980" dirty="0">
+              <a:rPr lang="en-US" sz="1050" dirty="0">
                 <a:solidFill>
                   <a:srgbClr val="6E6B68"/>
                 </a:solidFill>
@@ -3894,24 +3789,24 @@
               </a:rPr>
               <a:t>하한이 없습니다. 오히려 지역과 카테고리가 뚜렷한 채널이 동네 이용권과 잘 맞습니다.</a:t>
             </a:r>
-            <a:endParaRPr lang="en-US" sz="980" dirty="0"/>
-          </a:p>
-        </p:txBody>
-      </p:sp>
-      <p:sp>
-        <p:nvSpPr>
-          <p:cNvPr id="12" name="Shape 9"/>
+            <a:endParaRPr lang="en-US" sz="1050" dirty="0"/>
+          </a:p>
+        </p:txBody>
+      </p:sp>
+      <p:sp>
+        <p:nvSpPr>
+          <p:cNvPr id="10" name="Shape 7"/>
           <p:cNvSpPr/>
           <p:nvPr/>
         </p:nvSpPr>
         <p:spPr>
           <a:xfrm>
-            <a:off x="4368698" y="3657600"/>
-            <a:ext cx="3454298" cy="1161288"/>
+            <a:off x="4368698" y="2560320"/>
+            <a:ext cx="3454298" cy="1600200"/>
           </a:xfrm>
           <a:prstGeom prst="roundRect">
             <a:avLst>
-              <a:gd name="adj" fmla="val 11024"/>
+              <a:gd name="adj" fmla="val 8000"/>
             </a:avLst>
           </a:prstGeom>
           <a:solidFill>
@@ -3934,30 +3829,30 @@
       </p:sp>
       <p:sp>
         <p:nvSpPr>
-          <p:cNvPr id="13" name="Text 10"/>
-          <p:cNvSpPr txBox="1"/>
-          <p:nvPr/>
-        </p:nvSpPr>
-        <p:spPr>
-          <a:xfrm>
-            <a:off x="4606442" y="3803904"/>
-            <a:ext cx="2978810" cy="256032"/>
-          </a:xfrm>
-          <a:prstGeom prst="rect">
-            <a:avLst/>
-          </a:prstGeom>
-          <a:noFill/>
-          <a:ln/>
-        </p:spPr>
-        <p:txBody>
-          <a:bodyPr wrap="square" lIns="0" tIns="0" rIns="0" bIns="0" rtlCol="0" anchor="ctr"/>
-          <a:lstStyle/>
-          <a:p>
-            <a:pPr indent="0" marL="0">
-              <a:buNone/>
-            </a:pPr>
-            <a:r>
-              <a:rPr lang="en-US" sz="1150" b="1" spc="-30" kern="0" dirty="0">
+          <p:cNvPr id="11" name="Text 8"/>
+          <p:cNvSpPr txBox="1"/>
+          <p:nvPr/>
+        </p:nvSpPr>
+        <p:spPr>
+          <a:xfrm>
+            <a:off x="4643018" y="2779776"/>
+            <a:ext cx="2905658" cy="274320"/>
+          </a:xfrm>
+          <a:prstGeom prst="rect">
+            <a:avLst/>
+          </a:prstGeom>
+          <a:noFill/>
+          <a:ln/>
+        </p:spPr>
+        <p:txBody>
+          <a:bodyPr wrap="square" lIns="0" tIns="0" rIns="0" bIns="0" rtlCol="0" anchor="ctr"/>
+          <a:lstStyle/>
+          <a:p>
+            <a:pPr indent="0" marL="0">
+              <a:buNone/>
+            </a:pPr>
+            <a:r>
+              <a:rPr lang="en-US" sz="1250" b="1" spc="-30" kern="0" dirty="0">
                 <a:solidFill>
                   <a:srgbClr val="16181C"/>
                 </a:solidFill>
@@ -3967,20 +3862,20 @@
               </a:rPr>
               <a:t>비용이 드나요?</a:t>
             </a:r>
-            <a:endParaRPr lang="en-US" sz="1150" dirty="0"/>
-          </a:p>
-        </p:txBody>
-      </p:sp>
-      <p:sp>
-        <p:nvSpPr>
-          <p:cNvPr id="14" name="Text 11"/>
-          <p:cNvSpPr txBox="1"/>
-          <p:nvPr/>
-        </p:nvSpPr>
-        <p:spPr>
-          <a:xfrm>
-            <a:off x="4606442" y="4087368"/>
-            <a:ext cx="2978810" cy="694944"/>
+            <a:endParaRPr lang="en-US" sz="1250" dirty="0"/>
+          </a:p>
+        </p:txBody>
+      </p:sp>
+      <p:sp>
+        <p:nvSpPr>
+          <p:cNvPr id="12" name="Text 9"/>
+          <p:cNvSpPr txBox="1"/>
+          <p:nvPr/>
+        </p:nvSpPr>
+        <p:spPr>
+          <a:xfrm>
+            <a:off x="4643018" y="3127248"/>
+            <a:ext cx="2905658" cy="960120"/>
           </a:xfrm>
           <a:prstGeom prst="rect">
             <a:avLst/>
@@ -3994,12 +3889,12 @@
           <a:p>
             <a:pPr indent="0" marL="0">
               <a:lnSpc>
-                <a:spcPct val="136000"/>
+                <a:spcPct val="142000"/>
               </a:lnSpc>
               <a:buNone/>
             </a:pPr>
             <a:r>
-              <a:rPr lang="en-US" sz="980" dirty="0">
+              <a:rPr lang="en-US" sz="1050" dirty="0">
                 <a:solidFill>
                   <a:srgbClr val="6E6B68"/>
                 </a:solidFill>
@@ -4009,24 +3904,24 @@
               </a:rPr>
               <a:t>가입비도 이용료도 없습니다. 소개비는 매장이, 영입비는 유어딜이 냅니다.</a:t>
             </a:r>
-            <a:endParaRPr lang="en-US" sz="980" dirty="0"/>
-          </a:p>
-        </p:txBody>
-      </p:sp>
-      <p:sp>
-        <p:nvSpPr>
-          <p:cNvPr id="15" name="Shape 12"/>
+            <a:endParaRPr lang="en-US" sz="1050" dirty="0"/>
+          </a:p>
+        </p:txBody>
+      </p:sp>
+      <p:sp>
+        <p:nvSpPr>
+          <p:cNvPr id="13" name="Shape 10"/>
           <p:cNvSpPr/>
           <p:nvPr/>
         </p:nvSpPr>
         <p:spPr>
           <a:xfrm>
-            <a:off x="8051597" y="3657600"/>
-            <a:ext cx="3454298" cy="1161288"/>
+            <a:off x="8051597" y="2560320"/>
+            <a:ext cx="3454298" cy="1600200"/>
           </a:xfrm>
           <a:prstGeom prst="roundRect">
             <a:avLst>
-              <a:gd name="adj" fmla="val 11024"/>
+              <a:gd name="adj" fmla="val 8000"/>
             </a:avLst>
           </a:prstGeom>
           <a:solidFill>
@@ -4049,30 +3944,30 @@
       </p:sp>
       <p:sp>
         <p:nvSpPr>
-          <p:cNvPr id="16" name="Text 13"/>
-          <p:cNvSpPr txBox="1"/>
-          <p:nvPr/>
-        </p:nvSpPr>
-        <p:spPr>
-          <a:xfrm>
-            <a:off x="8289341" y="3803904"/>
-            <a:ext cx="2978810" cy="256032"/>
-          </a:xfrm>
-          <a:prstGeom prst="rect">
-            <a:avLst/>
-          </a:prstGeom>
-          <a:noFill/>
-          <a:ln/>
-        </p:spPr>
-        <p:txBody>
-          <a:bodyPr wrap="square" lIns="0" tIns="0" rIns="0" bIns="0" rtlCol="0" anchor="ctr"/>
-          <a:lstStyle/>
-          <a:p>
-            <a:pPr indent="0" marL="0">
-              <a:buNone/>
-            </a:pPr>
-            <a:r>
-              <a:rPr lang="en-US" sz="1150" b="1" spc="-30" kern="0" dirty="0">
+          <p:cNvPr id="14" name="Text 11"/>
+          <p:cNvSpPr txBox="1"/>
+          <p:nvPr/>
+        </p:nvSpPr>
+        <p:spPr>
+          <a:xfrm>
+            <a:off x="8325917" y="2779776"/>
+            <a:ext cx="2905658" cy="274320"/>
+          </a:xfrm>
+          <a:prstGeom prst="rect">
+            <a:avLst/>
+          </a:prstGeom>
+          <a:noFill/>
+          <a:ln/>
+        </p:spPr>
+        <p:txBody>
+          <a:bodyPr wrap="square" lIns="0" tIns="0" rIns="0" bIns="0" rtlCol="0" anchor="ctr"/>
+          <a:lstStyle/>
+          <a:p>
+            <a:pPr indent="0" marL="0">
+              <a:buNone/>
+            </a:pPr>
+            <a:r>
+              <a:rPr lang="en-US" sz="1250" b="1" spc="-30" kern="0" dirty="0">
                 <a:solidFill>
                   <a:srgbClr val="16181C"/>
                 </a:solidFill>
@@ -4082,20 +3977,20 @@
               </a:rPr>
               <a:t>콘텐츠 형식이 정해져 있나요?</a:t>
             </a:r>
-            <a:endParaRPr lang="en-US" sz="1150" dirty="0"/>
-          </a:p>
-        </p:txBody>
-      </p:sp>
-      <p:sp>
-        <p:nvSpPr>
-          <p:cNvPr id="17" name="Text 14"/>
-          <p:cNvSpPr txBox="1"/>
-          <p:nvPr/>
-        </p:nvSpPr>
-        <p:spPr>
-          <a:xfrm>
-            <a:off x="8289341" y="4087368"/>
-            <a:ext cx="2978810" cy="694944"/>
+            <a:endParaRPr lang="en-US" sz="1250" dirty="0"/>
+          </a:p>
+        </p:txBody>
+      </p:sp>
+      <p:sp>
+        <p:nvSpPr>
+          <p:cNvPr id="15" name="Text 12"/>
+          <p:cNvSpPr txBox="1"/>
+          <p:nvPr/>
+        </p:nvSpPr>
+        <p:spPr>
+          <a:xfrm>
+            <a:off x="8325917" y="3127248"/>
+            <a:ext cx="2905658" cy="960120"/>
           </a:xfrm>
           <a:prstGeom prst="rect">
             <a:avLst/>
@@ -4109,12 +4004,12 @@
           <a:p>
             <a:pPr indent="0" marL="0">
               <a:lnSpc>
-                <a:spcPct val="136000"/>
+                <a:spcPct val="142000"/>
               </a:lnSpc>
               <a:buNone/>
             </a:pPr>
             <a:r>
-              <a:rPr lang="en-US" sz="980" dirty="0">
+              <a:rPr lang="en-US" sz="1050" dirty="0">
                 <a:solidFill>
                   <a:srgbClr val="6E6B68"/>
                 </a:solidFill>
@@ -4124,24 +4019,24 @@
               </a:rPr>
               <a:t>자유입니다. 제안에 조건이 붙어 있으면 그 조건을 지켜야 그 소개비가 발효됩니다.</a:t>
             </a:r>
-            <a:endParaRPr lang="en-US" sz="980" dirty="0"/>
-          </a:p>
-        </p:txBody>
-      </p:sp>
-      <p:sp>
-        <p:nvSpPr>
-          <p:cNvPr id="18" name="Shape 15"/>
+            <a:endParaRPr lang="en-US" sz="1050" dirty="0"/>
+          </a:p>
+        </p:txBody>
+      </p:sp>
+      <p:sp>
+        <p:nvSpPr>
+          <p:cNvPr id="16" name="Shape 13"/>
           <p:cNvSpPr/>
           <p:nvPr/>
         </p:nvSpPr>
         <p:spPr>
           <a:xfrm>
-            <a:off x="685800" y="4983480"/>
-            <a:ext cx="3454298" cy="1161288"/>
+            <a:off x="685800" y="4389120"/>
+            <a:ext cx="3454298" cy="1600200"/>
           </a:xfrm>
           <a:prstGeom prst="roundRect">
             <a:avLst>
-              <a:gd name="adj" fmla="val 11024"/>
+              <a:gd name="adj" fmla="val 8000"/>
             </a:avLst>
           </a:prstGeom>
           <a:solidFill>
@@ -4164,30 +4059,30 @@
       </p:sp>
       <p:sp>
         <p:nvSpPr>
-          <p:cNvPr id="19" name="Text 16"/>
-          <p:cNvSpPr txBox="1"/>
-          <p:nvPr/>
-        </p:nvSpPr>
-        <p:spPr>
-          <a:xfrm>
-            <a:off x="923544" y="5129784"/>
-            <a:ext cx="2978810" cy="256032"/>
-          </a:xfrm>
-          <a:prstGeom prst="rect">
-            <a:avLst/>
-          </a:prstGeom>
-          <a:noFill/>
-          <a:ln/>
-        </p:spPr>
-        <p:txBody>
-          <a:bodyPr wrap="square" lIns="0" tIns="0" rIns="0" bIns="0" rtlCol="0" anchor="ctr"/>
-          <a:lstStyle/>
-          <a:p>
-            <a:pPr indent="0" marL="0">
-              <a:buNone/>
-            </a:pPr>
-            <a:r>
-              <a:rPr lang="en-US" sz="1150" b="1" spc="-30" kern="0" dirty="0">
+          <p:cNvPr id="17" name="Text 14"/>
+          <p:cNvSpPr txBox="1"/>
+          <p:nvPr/>
+        </p:nvSpPr>
+        <p:spPr>
+          <a:xfrm>
+            <a:off x="960120" y="4608576"/>
+            <a:ext cx="2905658" cy="274320"/>
+          </a:xfrm>
+          <a:prstGeom prst="rect">
+            <a:avLst/>
+          </a:prstGeom>
+          <a:noFill/>
+          <a:ln/>
+        </p:spPr>
+        <p:txBody>
+          <a:bodyPr wrap="square" lIns="0" tIns="0" rIns="0" bIns="0" rtlCol="0" anchor="ctr"/>
+          <a:lstStyle/>
+          <a:p>
+            <a:pPr indent="0" marL="0">
+              <a:buNone/>
+            </a:pPr>
+            <a:r>
+              <a:rPr lang="en-US" sz="1250" b="1" spc="-30" kern="0" dirty="0">
                 <a:solidFill>
                   <a:srgbClr val="16181C"/>
                 </a:solidFill>
@@ -4197,20 +4092,20 @@
               </a:rPr>
               <a:t>소개비가 안 붙는 이용권도 있나요?</a:t>
             </a:r>
-            <a:endParaRPr lang="en-US" sz="1150" dirty="0"/>
-          </a:p>
-        </p:txBody>
-      </p:sp>
-      <p:sp>
-        <p:nvSpPr>
-          <p:cNvPr id="20" name="Text 17"/>
-          <p:cNvSpPr txBox="1"/>
-          <p:nvPr/>
-        </p:nvSpPr>
-        <p:spPr>
-          <a:xfrm>
-            <a:off x="923544" y="5413248"/>
-            <a:ext cx="2978810" cy="694944"/>
+            <a:endParaRPr lang="en-US" sz="1250" dirty="0"/>
+          </a:p>
+        </p:txBody>
+      </p:sp>
+      <p:sp>
+        <p:nvSpPr>
+          <p:cNvPr id="18" name="Text 15"/>
+          <p:cNvSpPr txBox="1"/>
+          <p:nvPr/>
+        </p:nvSpPr>
+        <p:spPr>
+          <a:xfrm>
+            <a:off x="960120" y="4956048"/>
+            <a:ext cx="2905658" cy="960120"/>
           </a:xfrm>
           <a:prstGeom prst="rect">
             <a:avLst/>
@@ -4224,12 +4119,12 @@
           <a:p>
             <a:pPr indent="0" marL="0">
               <a:lnSpc>
-                <a:spcPct val="136000"/>
+                <a:spcPct val="142000"/>
               </a:lnSpc>
               <a:buNone/>
             </a:pPr>
             <a:r>
-              <a:rPr lang="en-US" sz="980" dirty="0">
+              <a:rPr lang="en-US" sz="1050" dirty="0">
                 <a:solidFill>
                   <a:srgbClr val="6E6B68"/>
                 </a:solidFill>
@@ -4239,24 +4134,24 @@
               </a:rPr>
               <a:t>있습니다. 매장과 맺은 딜이 없는 이용권은 담아 둘 수는 있지만 소개비가 0 입니다.</a:t>
             </a:r>
-            <a:endParaRPr lang="en-US" sz="980" dirty="0"/>
-          </a:p>
-        </p:txBody>
-      </p:sp>
-      <p:sp>
-        <p:nvSpPr>
-          <p:cNvPr id="21" name="Shape 18"/>
+            <a:endParaRPr lang="en-US" sz="1050" dirty="0"/>
+          </a:p>
+        </p:txBody>
+      </p:sp>
+      <p:sp>
+        <p:nvSpPr>
+          <p:cNvPr id="19" name="Shape 16"/>
           <p:cNvSpPr/>
           <p:nvPr/>
         </p:nvSpPr>
         <p:spPr>
           <a:xfrm>
-            <a:off x="4368698" y="4983480"/>
-            <a:ext cx="3454298" cy="1161288"/>
+            <a:off x="4368698" y="4389120"/>
+            <a:ext cx="3454298" cy="1600200"/>
           </a:xfrm>
           <a:prstGeom prst="roundRect">
             <a:avLst>
-              <a:gd name="adj" fmla="val 11024"/>
+              <a:gd name="adj" fmla="val 8000"/>
             </a:avLst>
           </a:prstGeom>
           <a:solidFill>
@@ -4279,30 +4174,30 @@
       </p:sp>
       <p:sp>
         <p:nvSpPr>
-          <p:cNvPr id="22" name="Text 19"/>
-          <p:cNvSpPr txBox="1"/>
-          <p:nvPr/>
-        </p:nvSpPr>
-        <p:spPr>
-          <a:xfrm>
-            <a:off x="4606442" y="5129784"/>
-            <a:ext cx="2978810" cy="256032"/>
-          </a:xfrm>
-          <a:prstGeom prst="rect">
-            <a:avLst/>
-          </a:prstGeom>
-          <a:noFill/>
-          <a:ln/>
-        </p:spPr>
-        <p:txBody>
-          <a:bodyPr wrap="square" lIns="0" tIns="0" rIns="0" bIns="0" rtlCol="0" anchor="ctr"/>
-          <a:lstStyle/>
-          <a:p>
-            <a:pPr indent="0" marL="0">
-              <a:buNone/>
-            </a:pPr>
-            <a:r>
-              <a:rPr lang="en-US" sz="1150" b="1" spc="-30" kern="0" dirty="0">
+          <p:cNvPr id="20" name="Text 17"/>
+          <p:cNvSpPr txBox="1"/>
+          <p:nvPr/>
+        </p:nvSpPr>
+        <p:spPr>
+          <a:xfrm>
+            <a:off x="4643018" y="4608576"/>
+            <a:ext cx="2905658" cy="274320"/>
+          </a:xfrm>
+          <a:prstGeom prst="rect">
+            <a:avLst/>
+          </a:prstGeom>
+          <a:noFill/>
+          <a:ln/>
+        </p:spPr>
+        <p:txBody>
+          <a:bodyPr wrap="square" lIns="0" tIns="0" rIns="0" bIns="0" rtlCol="0" anchor="ctr"/>
+          <a:lstStyle/>
+          <a:p>
+            <a:pPr indent="0" marL="0">
+              <a:buNone/>
+            </a:pPr>
+            <a:r>
+              <a:rPr lang="en-US" sz="1250" b="1" spc="-30" kern="0" dirty="0">
                 <a:solidFill>
                   <a:srgbClr val="16181C"/>
                 </a:solidFill>
@@ -4312,20 +4207,20 @@
               </a:rPr>
               <a:t>광고 표시를 해야 하나요?</a:t>
             </a:r>
-            <a:endParaRPr lang="en-US" sz="1150" dirty="0"/>
-          </a:p>
-        </p:txBody>
-      </p:sp>
-      <p:sp>
-        <p:nvSpPr>
-          <p:cNvPr id="23" name="Text 20"/>
-          <p:cNvSpPr txBox="1"/>
-          <p:nvPr/>
-        </p:nvSpPr>
-        <p:spPr>
-          <a:xfrm>
-            <a:off x="4606442" y="5413248"/>
-            <a:ext cx="2978810" cy="694944"/>
+            <a:endParaRPr lang="en-US" sz="1250" dirty="0"/>
+          </a:p>
+        </p:txBody>
+      </p:sp>
+      <p:sp>
+        <p:nvSpPr>
+          <p:cNvPr id="21" name="Text 18"/>
+          <p:cNvSpPr txBox="1"/>
+          <p:nvPr/>
+        </p:nvSpPr>
+        <p:spPr>
+          <a:xfrm>
+            <a:off x="4643018" y="4956048"/>
+            <a:ext cx="2905658" cy="960120"/>
           </a:xfrm>
           <a:prstGeom prst="rect">
             <a:avLst/>
@@ -4339,12 +4234,12 @@
           <a:p>
             <a:pPr indent="0" marL="0">
               <a:lnSpc>
-                <a:spcPct val="136000"/>
+                <a:spcPct val="142000"/>
               </a:lnSpc>
               <a:buNone/>
             </a:pPr>
             <a:r>
-              <a:rPr lang="en-US" sz="980" dirty="0">
+              <a:rPr lang="en-US" sz="1050" dirty="0">
                 <a:solidFill>
                   <a:srgbClr val="6E6B68"/>
                 </a:solidFill>
@@ -4354,24 +4249,24 @@
               </a:rPr>
               <a:t>네. 소개비를 받는 콘텐츠에는 "광고" 처럼 경제적 대가를 받았다는 표시가 법으로 필요합니다. 표시 없이 올린 콘텐츠의 책임은 유어딜이 대신 질 수 없습니다.</a:t>
             </a:r>
-            <a:endParaRPr lang="en-US" sz="980" dirty="0"/>
-          </a:p>
-        </p:txBody>
-      </p:sp>
-      <p:sp>
-        <p:nvSpPr>
-          <p:cNvPr id="24" name="Shape 21"/>
+            <a:endParaRPr lang="en-US" sz="1050" dirty="0"/>
+          </a:p>
+        </p:txBody>
+      </p:sp>
+      <p:sp>
+        <p:nvSpPr>
+          <p:cNvPr id="22" name="Shape 19"/>
           <p:cNvSpPr/>
           <p:nvPr/>
         </p:nvSpPr>
         <p:spPr>
           <a:xfrm>
-            <a:off x="8051597" y="4983480"/>
-            <a:ext cx="3454298" cy="1161288"/>
+            <a:off x="8051597" y="4389120"/>
+            <a:ext cx="3454298" cy="1600200"/>
           </a:xfrm>
           <a:prstGeom prst="roundRect">
             <a:avLst>
-              <a:gd name="adj" fmla="val 11024"/>
+              <a:gd name="adj" fmla="val 8000"/>
             </a:avLst>
           </a:prstGeom>
           <a:solidFill>
@@ -4394,30 +4289,30 @@
       </p:sp>
       <p:sp>
         <p:nvSpPr>
-          <p:cNvPr id="25" name="Text 22"/>
-          <p:cNvSpPr txBox="1"/>
-          <p:nvPr/>
-        </p:nvSpPr>
-        <p:spPr>
-          <a:xfrm>
-            <a:off x="8289341" y="5129784"/>
-            <a:ext cx="2978810" cy="256032"/>
-          </a:xfrm>
-          <a:prstGeom prst="rect">
-            <a:avLst/>
-          </a:prstGeom>
-          <a:noFill/>
-          <a:ln/>
-        </p:spPr>
-        <p:txBody>
-          <a:bodyPr wrap="square" lIns="0" tIns="0" rIns="0" bIns="0" rtlCol="0" anchor="ctr"/>
-          <a:lstStyle/>
-          <a:p>
-            <a:pPr indent="0" marL="0">
-              <a:buNone/>
-            </a:pPr>
-            <a:r>
-              <a:rPr lang="en-US" sz="1150" b="1" spc="-30" kern="0" dirty="0">
+          <p:cNvPr id="23" name="Text 20"/>
+          <p:cNvSpPr txBox="1"/>
+          <p:nvPr/>
+        </p:nvSpPr>
+        <p:spPr>
+          <a:xfrm>
+            <a:off x="8325917" y="4608576"/>
+            <a:ext cx="2905658" cy="274320"/>
+          </a:xfrm>
+          <a:prstGeom prst="rect">
+            <a:avLst/>
+          </a:prstGeom>
+          <a:noFill/>
+          <a:ln/>
+        </p:spPr>
+        <p:txBody>
+          <a:bodyPr wrap="square" lIns="0" tIns="0" rIns="0" bIns="0" rtlCol="0" anchor="ctr"/>
+          <a:lstStyle/>
+          <a:p>
+            <a:pPr indent="0" marL="0">
+              <a:buNone/>
+            </a:pPr>
+            <a:r>
+              <a:rPr lang="en-US" sz="1250" b="1" spc="-30" kern="0" dirty="0">
                 <a:solidFill>
                   <a:srgbClr val="16181C"/>
                 </a:solidFill>
@@ -4427,20 +4322,20 @@
               </a:rPr>
               <a:t>제안은 어떻게 오나요?</a:t>
             </a:r>
-            <a:endParaRPr lang="en-US" sz="1150" dirty="0"/>
-          </a:p>
-        </p:txBody>
-      </p:sp>
-      <p:sp>
-        <p:nvSpPr>
-          <p:cNvPr id="26" name="Text 23"/>
-          <p:cNvSpPr txBox="1"/>
-          <p:nvPr/>
-        </p:nvSpPr>
-        <p:spPr>
-          <a:xfrm>
-            <a:off x="8289341" y="5413248"/>
-            <a:ext cx="2978810" cy="694944"/>
+            <a:endParaRPr lang="en-US" sz="1250" dirty="0"/>
+          </a:p>
+        </p:txBody>
+      </p:sp>
+      <p:sp>
+        <p:nvSpPr>
+          <p:cNvPr id="24" name="Text 21"/>
+          <p:cNvSpPr txBox="1"/>
+          <p:nvPr/>
+        </p:nvSpPr>
+        <p:spPr>
+          <a:xfrm>
+            <a:off x="8325917" y="4956048"/>
+            <a:ext cx="2905658" cy="960120"/>
           </a:xfrm>
           <a:prstGeom prst="rect">
             <a:avLst/>
@@ -4454,12 +4349,12 @@
           <a:p>
             <a:pPr indent="0" marL="0">
               <a:lnSpc>
-                <a:spcPct val="136000"/>
+                <a:spcPct val="142000"/>
               </a:lnSpc>
               <a:buNone/>
             </a:pPr>
             <a:r>
-              <a:rPr lang="en-US" sz="980" dirty="0">
+              <a:rPr lang="en-US" sz="1050" dirty="0">
                 <a:solidFill>
                   <a:srgbClr val="6E6B68"/>
                 </a:solidFill>
@@ -4469,7 +4364,7 @@
               </a:rPr>
               <a:t>신청서는 유어딜 담당자가 보고, 매장은 내가 공개해 둔 소개자 프로필을 보고 직접 보냅니다. 둘 다 해 두는 것이 빠릅니다.</a:t>
             </a:r>
-            <a:endParaRPr lang="en-US" sz="980" dirty="0"/>
+            <a:endParaRPr lang="en-US" sz="1050" dirty="0"/>
           </a:p>
         </p:txBody>
       </p:sp>

--- a/docs/business/proposals/urdeal-influencer-deck.pptx
+++ b/docs/business/proposals/urdeal-influencer-deck.pptx
@@ -873,7 +873,7 @@
           <a:p>
             <a:r>
               <a:rPr lang="en-US" dirty="0"/>
-              <a:t>⚠️ 대표 09-19: "실제 유어딜 플로우를 다시 봐야 한다 · 이 부분은 마지막에 다시 작업" — 자격(인플루언서/대행사/중개사) 선택 가입은 라이브에 없다(/seller/register/supplier 는 사업자 정보 폼). 지금은 URL 만 빼고 문구를 중개사 가입으로 바꿔 둔 상태. 제안 수락: /i/offer/:token → tracking_url. 정산 화면: /influencer/settlement.</a:t>
+              <a:t>09-19 대표 확정 플로우 7·8·9 단계(docs/decisions/2026-09-19-broker-matching-flow.md): 코드 링크 탭 → 가입 즉시 매칭 · 마이페이지 코드 입력은 직접 온 사람용 · 매장 단위 고유 링크(복사·카톡 공유, 이용권 바뀌어도 그대로). 🚧 코드 미착수 — 그래서 이 장은 화면 대신 카드. 열리면 마이페이지 캡처로 교체.</a:t>
             </a:r>
             <a:endParaRPr lang="en-US" dirty="0"/>
           </a:p>
@@ -961,7 +961,7 @@
           <a:p>
             <a:r>
               <a:rPr lang="en-US" dirty="0"/>
-              <a:t>중개 등록: /store/new 마법사 "중개·대행사에요"(store_channel=brokered → 5%, fee-resolver.ts). 운영: seller_operators. 영입 2%·1년·직접 입점 조건은 09-19 폐지로 제거.</a:t>
+              <a:t>09-19 대표 확정 플로우 2·4·5 단계: 매장 등록 때 코드 자동 생성 + 두 요율 · 사장님이 가입하며 코드 입력 → owner(등록증 확인 그대로, 첫 정산 전까지만, 판매 안 막음) · 대행사 = operator. 라이브: /store/new "중개·대행사에요"(brokered → 5%) + seller_operators. 🚧 코드·요율 입력은 미착수.</a:t>
             </a:r>
             <a:endParaRPr lang="en-US" dirty="0"/>
           </a:p>
@@ -1401,7 +1401,7 @@
           <a:p>
             <a:r>
               <a:rPr lang="en-US" dirty="0"/>
-              <a:t>09-15 참고 덱 "광고 집행 절차" 장치. 09-19: 경로 B 를 영입 2% → 중개사 등록(5%) 으로, URL 문자열 제거. 사실: /i/offer/:token 수락 · /store/new 중개 등록 · influencer-payout.ts(매월 1일 · 10만원 · 딜 하한 없음 · 이월).</a:t>
+              <a:t>09-15 참고 덱 "광고 집행 절차" 장치. 09-19 v4: 두 경로를 대표 확정 플로우(코드 링크 · 매장 코드 · 두 요율)로. 사실: influencer-payout.ts(매월 1일 · 10만원 · 딜 하한 없음 · 이월). 🚧 코드 링크·매장 코드는 미착수.</a:t>
             </a:r>
             <a:endParaRPr lang="en-US" dirty="0"/>
           </a:p>
@@ -2105,7 +2105,7 @@
           <a:p>
             <a:r>
               <a:rPr lang="en-US" dirty="0"/>
-              <a:t>직접 10% / 중개 5%: fee-resolver.ts. 카드 수수료(약 2.75%)는 이 덱에서 말하지 않는다(09-19 대표). 딜 소개비: 매장 부담(store-operator-model §7). 영입 2% 제거(09-19).</a:t>
+              <a:t>직접 10% / 중개 5%: fee-resolver.ts. 카드 수수료(약 2.75%)는 이 덱에서 말하지 않는다(09-19 대표). 소개비 %: 매장 등록 때 정함(09-19 확정 플로우, 코드 미착수). 영입 2% 제거(09-19).</a:t>
             </a:r>
             <a:endParaRPr lang="en-US" dirty="0"/>
           </a:p>
@@ -2193,7 +2193,7 @@
           <a:p>
             <a:r>
               <a:rPr lang="en-US" dirty="0"/>
-              <a:t>딜 소개비: influencer-deals(매장 제안 %, 상한 없음). 중개 매장 등록: /store/new "중개·대행사에요"(store_channel=brokered → 5%). 영입 2% 열은 09-19 폐지로 삭제하고 "내가 섭외한 매장" 열로 교체.</a:t>
+              <a:t>09-19 확정 플로우(docs/decisions/2026-09-19-broker-matching-flow.md): 코드 링크 한 탭 매칭 · 매장 단위 링크 · 두 요율은 매장 등록 때 · 중개사 몫은 유어딜 직접 송금(09-16). 🚧 코드 미착수 — 라이브는 아직 influencer-deals(제안·수락) + /store/new 중개 등록. 영입 2% 열은 09-19 폐지.</a:t>
             </a:r>
             <a:endParaRPr lang="en-US" dirty="0"/>
           </a:p>
@@ -3350,7 +3350,7 @@
                 <a:ea typeface="Pretendard" pitchFamily="34" charset="-122"/>
                 <a:cs typeface="Pretendard" pitchFamily="34" charset="-120"/>
               </a:rPr>
-              <a:t>매장이 제안한 소개비 12%</a:t>
+              <a:t>매장 등록 때 정한 소개비 12%</a:t>
             </a:r>
             <a:endParaRPr lang="en-US" sz="1150" dirty="0"/>
           </a:p>
@@ -4411,7 +4411,7 @@
                 <a:ea typeface="Pretendard" pitchFamily="34" charset="-122"/>
                 <a:cs typeface="Pretendard" pitchFamily="34" charset="-120"/>
               </a:rPr>
-              <a:t>한 바퀴가 돌 때마다 내 유어샵에 이용권과 실적이 남고, 다음 제안이 더 쉽게 옵니다.</a:t>
+              <a:t>한 바퀴가 돌 때마다 내 유어샵에 이용권과 실적이 남고, 다음 매장의 링크가 더 쉽게 옵니다.</a:t>
             </a:r>
             <a:endParaRPr lang="en-US" sz="1250" dirty="0"/>
           </a:p>
@@ -5079,7 +5079,7 @@
                 <a:ea typeface="Pretendard" pitchFamily="34" charset="-122"/>
                 <a:cs typeface="Pretendard" pitchFamily="34" charset="-120"/>
               </a:rPr>
-              <a:t>매장이 다시 제안</a:t>
+              <a:t>다음 매장 링크</a:t>
             </a:r>
             <a:endParaRPr lang="en-US" sz="1250" dirty="0"/>
           </a:p>
@@ -5507,7 +5507,7 @@
                 <a:ea typeface="Pretendard" pitchFamily="34" charset="-122"/>
                 <a:cs typeface="Pretendard" pitchFamily="34" charset="-120"/>
               </a:rPr>
-              <a:t>내 정산 화면에 딜별 주문과 확정 금액이 쌓입니다. 매장은 공개된 소개자 프로필과 실적을 보고 제안합니다.</a:t>
+              <a:t>마이페이지에 매장별 주문과 확정 금액이 쌓입니다. 실적이 보이는 사람에게 대행사는 다음 매장의 링크를 먼저 보냅니다.</a:t>
             </a:r>
             <a:endParaRPr lang="en-US" sz="1050" dirty="0"/>
           </a:p>
@@ -5637,7 +5637,7 @@
                 <a:ea typeface="Pretendard" pitchFamily="34" charset="-122"/>
                 <a:cs typeface="Pretendard" pitchFamily="34" charset="-120"/>
               </a:rPr>
-              <a:t>중개사 계정으로 섭외한 매장이 늘수록 딜과 이용권이 늘고, 유어샵 진열대가 넓어집니다. 매장 하나가 바퀴 하나를 더 만듭니다.</a:t>
+              <a:t>링크로 매칭된 매장과 내가 섭외한 매장이 늘수록 이용권이 늘고, 유어샵 진열대가 넓어집니다. 매장 하나가 바퀴 하나를 더 만듭니다.</a:t>
             </a:r>
             <a:endParaRPr lang="en-US" sz="1050" dirty="0"/>
           </a:p>
@@ -5894,7 +5894,7 @@
                 <a:ea typeface="Pretendard" pitchFamily="34" charset="-122"/>
                 <a:cs typeface="Pretendard" pitchFamily="34" charset="-120"/>
               </a:rPr>
-              <a:t>제안을 받는 길과 매장을 섭외하는 길, 링크를 두는 자리, 정산 시점, 자주 묻는 질문.</a:t>
+              <a:t>링크로 시작하는 길과 매장을 섭외하는 길, 링크를 두는 자리, 정산 시점, 자주 묻는 질문.</a:t>
             </a:r>
             <a:endParaRPr lang="en-US" sz="1300" dirty="0"/>
           </a:p>
@@ -5972,7 +5972,7 @@
                 <a:ea typeface="Pretendard" pitchFamily="34" charset="-122"/>
                 <a:cs typeface="Pretendard" pitchFamily="34" charset="-120"/>
               </a:rPr>
-              <a:t>경로 A · 제안을 받는다</a:t>
+              <a:t>경로 A · 링크로 시작한다</a:t>
             </a:r>
             <a:endParaRPr lang="en-US" sz="1100" dirty="0"/>
           </a:p>
@@ -6499,7 +6499,7 @@
                 <a:ea typeface="Pretendard" pitchFamily="34" charset="-122"/>
                 <a:cs typeface="Pretendard" pitchFamily="34" charset="-120"/>
               </a:rPr>
-              <a:t>경로 A. 제안을 받고, 공유합니다.</a:t>
+              <a:t>경로 A. 링크 한 번이면 시작됩니다.</a:t>
             </a:r>
             <a:endParaRPr lang="en-US" sz="2700" dirty="0"/>
           </a:p>
@@ -6541,7 +6541,7 @@
                 <a:ea typeface="Pretendard" pitchFamily="34" charset="-122"/>
                 <a:cs typeface="Pretendard" pitchFamily="34" charset="-120"/>
               </a:rPr>
-              <a:t>매장 섭외가 필요 없습니다. 가입해 두면 조건을 담은 제안이 오고, 수락하면 그 자리에서 팔 수 있습니다. 수락하기 전까지 아무 의무도 생기지 않습니다.</a:t>
+              <a:t>대행사나 중개사가 매장 코드가 담긴 링크를 보냅니다. 탭하면 가입이 되고, 가입과 동시에 그 매장과 매칭됩니다. 따로 신청하거나 코드를 옮겨 적을 일이 없습니다.</a:t>
             </a:r>
             <a:endParaRPr lang="en-US" sz="1250" dirty="0"/>
           </a:p>
@@ -6644,7 +6644,7 @@
                 <a:ea typeface="Pretendard" pitchFamily="34" charset="-122"/>
                 <a:cs typeface="Pretendard" pitchFamily="34" charset="-120"/>
               </a:rPr>
-              <a:t>셀러 대시보드에 가입하고, 프로필을 공개한다</a:t>
+              <a:t>링크를 탭한다</a:t>
             </a:r>
             <a:endParaRPr lang="en-US" sz="1350" dirty="0"/>
           </a:p>
@@ -6686,7 +6686,7 @@
                 <a:ea typeface="Pretendard" pitchFamily="34" charset="-122"/>
                 <a:cs typeface="Pretendard" pitchFamily="34" charset="-120"/>
               </a:rPr>
-              <a:t>유어딜 셀러 대시보드에 인플루언서(중개사) 자격으로 가입합니다. 카카오 로그인 뒤 내 정산 화면에서 소개자 프로필을 "공개"로 켜면, 매장이 그 프로필을 보고 제안을 보냅니다. 팔로워 수 하한은 없습니다.</a:t>
+              <a:t>대행사(중개사)가 보낸 링크 하나입니다. 카카오 로그인으로 가입이 끝나고, 그 순간 그 매장과 매칭됩니다. 직접 찾아온 사람은 마이페이지에서 매장 코드를 입력하면 같은 자리로 들어옵니다.</a:t>
             </a:r>
             <a:endParaRPr lang="en-US" sz="1050" dirty="0"/>
           </a:p>
@@ -6789,7 +6789,7 @@
                 <a:ea typeface="Pretendard" pitchFamily="34" charset="-122"/>
                 <a:cs typeface="Pretendard" pitchFamily="34" charset="-120"/>
               </a:rPr>
-              <a:t>제안을 보고 수락한다</a:t>
+              <a:t>매장 단위 링크가 생긴다</a:t>
             </a:r>
             <a:endParaRPr lang="en-US" sz="1350" dirty="0"/>
           </a:p>
@@ -6831,7 +6831,7 @@
                 <a:ea typeface="Pretendard" pitchFamily="34" charset="-122"/>
                 <a:cs typeface="Pretendard" pitchFamily="34" charset="-120"/>
               </a:rPr>
-              <a:t>매장이 이용권과 소개비 %, 촬영 지원 여부를 담아 보냅니다. 수락하는 순간 조건이 발효되고 내 전용 링크가 발급됩니다.</a:t>
+              <a:t>마이페이지에 그 매장의 고유 링크가 생깁니다. 복사 버튼과 카톡 공유 버튼이 붙어 있고, 매장이 이용권을 바꿔도 링크는 그대로입니다.</a:t>
             </a:r>
             <a:endParaRPr lang="en-US" sz="1050" dirty="0"/>
           </a:p>
@@ -7079,7 +7079,7 @@
                 <a:ea typeface="Pretendard" pitchFamily="34" charset="-122"/>
                 <a:cs typeface="Pretendard" pitchFamily="34" charset="-120"/>
               </a:rPr>
-              <a:t>성과와 정산을 확인한다</a:t>
+              <a:t>적립을 확인한다</a:t>
             </a:r>
             <a:endParaRPr lang="en-US" sz="1350" dirty="0"/>
           </a:p>
@@ -7121,7 +7121,7 @@
                 <a:ea typeface="Pretendard" pitchFamily="34" charset="-122"/>
                 <a:cs typeface="Pretendard" pitchFamily="34" charset="-120"/>
               </a:rPr>
-              <a:t>내 정산 화면에서 딜별 주문과 대기, 확정 금액을 봅니다. 매장에 판매량을 물어볼 일이 없습니다.</a:t>
+              <a:t>마이페이지에서 매장별 주문과 대기, 확정 금액을 봅니다. 소개비 %는 매장 등록 때 정해진 값이라 물어볼 일이 없습니다.</a:t>
             </a:r>
             <a:endParaRPr lang="en-US" sz="1050" dirty="0"/>
           </a:p>
@@ -7207,113 +7207,107 @@
           </a:p>
         </p:txBody>
       </p:sp>
-      <p:pic>
-        <p:nvPicPr>
-          <p:cNvPr id="26" name="Image 1" descr="preencoded.png">    </p:cNvPr>
-          <p:cNvPicPr>
-            <a:picLocks noChangeAspect="1"/>
-          </p:cNvPicPr>
-          <p:nvPr/>
-        </p:nvPicPr>
-        <p:blipFill>
-          <a:blip r:embed="rId2"/>
-          <a:stretch>
-            <a:fillRect/>
-          </a:stretch>
-        </p:blipFill>
-        <p:spPr>
-          <a:xfrm>
-            <a:off x="8626773" y="717213"/>
-            <a:ext cx="2813205" cy="5377855"/>
-          </a:xfrm>
-          <a:prstGeom prst="rect">
-            <a:avLst/>
-          </a:prstGeom>
-        </p:spPr>
-      </p:pic>
-      <p:sp>
-        <p:nvSpPr>
-          <p:cNvPr id="27" name="Text 23"/>
-          <p:cNvSpPr txBox="1"/>
-          <p:nvPr/>
-        </p:nvSpPr>
-        <p:spPr>
-          <a:xfrm>
-            <a:off x="8503920" y="5998464"/>
-            <a:ext cx="3058911" cy="274320"/>
-          </a:xfrm>
-          <a:prstGeom prst="rect">
-            <a:avLst/>
-          </a:prstGeom>
-          <a:noFill/>
-          <a:ln/>
-        </p:spPr>
-        <p:txBody>
-          <a:bodyPr wrap="square" lIns="0" tIns="0" rIns="0" bIns="0" rtlCol="0" anchor="ctr"/>
-          <a:lstStyle/>
-          <a:p>
-            <a:pPr algn="ctr" indent="0" marL="0">
-              <a:buNone/>
-            </a:pPr>
-            <a:r>
-              <a:rPr lang="en-US" sz="1050" dirty="0">
-                <a:solidFill>
-                  <a:srgbClr val="6E6B68"/>
-                </a:solidFill>
-                <a:latin typeface="Pretendard" pitchFamily="34" charset="0"/>
-                <a:ea typeface="Pretendard" pitchFamily="34" charset="-122"/>
-                <a:cs typeface="Pretendard" pitchFamily="34" charset="-120"/>
-              </a:rPr>
-              <a:t>매장이 보낸 제안 (예시 데이터로 렌더한 실제 화면)</a:t>
-            </a:r>
-            <a:endParaRPr lang="en-US" sz="1050" dirty="0"/>
-          </a:p>
-        </p:txBody>
-      </p:sp>
-      <p:sp>
-        <p:nvSpPr>
-          <p:cNvPr id="28" name="Shape 24"/>
+      <p:sp>
+        <p:nvSpPr>
+          <p:cNvPr id="26" name="Shape 23"/>
           <p:cNvSpPr/>
           <p:nvPr/>
         </p:nvSpPr>
         <p:spPr>
           <a:xfrm>
-            <a:off x="8412480" y="3108960"/>
-            <a:ext cx="2591181" cy="274320"/>
+            <a:off x="8732520" y="1828800"/>
+            <a:ext cx="2773375" cy="4343400"/>
           </a:xfrm>
           <a:prstGeom prst="roundRect">
             <a:avLst>
-              <a:gd name="adj" fmla="val 50000"/>
+              <a:gd name="adj" fmla="val 4616"/>
             </a:avLst>
+          </a:prstGeom>
+          <a:solidFill>
+            <a:srgbClr val="EEF3FE"/>
+          </a:solidFill>
+          <a:ln w="12700">
+            <a:solidFill>
+              <a:srgbClr val="EEF3FE"/>
+            </a:solidFill>
+            <a:prstDash val="solid"/>
+          </a:ln>
+        </p:spPr>
+      </p:sp>
+      <p:sp>
+        <p:nvSpPr>
+          <p:cNvPr id="27" name="Text 24"/>
+          <p:cNvSpPr txBox="1"/>
+          <p:nvPr/>
+        </p:nvSpPr>
+        <p:spPr>
+          <a:xfrm>
+            <a:off x="9006840" y="2029968"/>
+            <a:ext cx="2224735" cy="237744"/>
+          </a:xfrm>
+          <a:prstGeom prst="rect">
+            <a:avLst/>
+          </a:prstGeom>
+          <a:noFill/>
+          <a:ln/>
+        </p:spPr>
+        <p:txBody>
+          <a:bodyPr wrap="square" lIns="0" tIns="0" rIns="0" bIns="0" rtlCol="0" anchor="ctr"/>
+          <a:lstStyle/>
+          <a:p>
+            <a:pPr indent="0" marL="0">
+              <a:buNone/>
+            </a:pPr>
+            <a:r>
+              <a:rPr lang="en-US" sz="1000" b="1" spc="120" kern="0" dirty="0">
+                <a:solidFill>
+                  <a:srgbClr val="1C69EF"/>
+                </a:solidFill>
+                <a:latin typeface="Pretendard" pitchFamily="34" charset="0"/>
+                <a:ea typeface="Pretendard" pitchFamily="34" charset="-122"/>
+                <a:cs typeface="Pretendard" pitchFamily="34" charset="-120"/>
+              </a:rPr>
+              <a:t>탭 한 번에 되는 세 가지</a:t>
+            </a:r>
+            <a:endParaRPr lang="en-US" sz="1000" dirty="0"/>
+          </a:p>
+        </p:txBody>
+      </p:sp>
+      <p:sp>
+        <p:nvSpPr>
+          <p:cNvPr id="28" name="Shape 25"/>
+          <p:cNvSpPr/>
+          <p:nvPr/>
+        </p:nvSpPr>
+        <p:spPr>
+          <a:xfrm>
+            <a:off x="9006840" y="2395728"/>
+            <a:ext cx="310896" cy="310896"/>
+          </a:xfrm>
+          <a:prstGeom prst="ellipse">
+            <a:avLst/>
           </a:prstGeom>
           <a:solidFill>
             <a:srgbClr val="1C69EF"/>
           </a:solidFill>
-          <a:ln w="12700">
+          <a:ln w="15875">
             <a:solidFill>
               <a:srgbClr val="1C69EF"/>
             </a:solidFill>
             <a:prstDash val="solid"/>
           </a:ln>
-          <a:effectLst>
-            <a:outerShdw sx="100000" sy="100000" kx="0" ky="0" algn="bl" rotWithShape="0" blurRad="76200" dist="25400" dir="5400000">
-              <a:srgbClr val="16181C">
-                <a:alpha val="22000"/>
-              </a:srgbClr>
-            </a:outerShdw>
-          </a:effectLst>
-        </p:spPr>
-      </p:sp>
-      <p:sp>
-        <p:nvSpPr>
-          <p:cNvPr id="29" name="Text 25"/>
-          <p:cNvSpPr txBox="1"/>
-          <p:nvPr/>
-        </p:nvSpPr>
-        <p:spPr>
-          <a:xfrm>
-            <a:off x="8412480" y="3108960"/>
-            <a:ext cx="2591181" cy="274320"/>
+        </p:spPr>
+      </p:sp>
+      <p:sp>
+        <p:nvSpPr>
+          <p:cNvPr id="29" name="Text 26"/>
+          <p:cNvSpPr txBox="1"/>
+          <p:nvPr/>
+        </p:nvSpPr>
+        <p:spPr>
+          <a:xfrm>
+            <a:off x="9006840" y="2395728"/>
+            <a:ext cx="310896" cy="310896"/>
           </a:xfrm>
           <a:prstGeom prst="rect">
             <a:avLst/>
@@ -7329,7 +7323,7 @@
               <a:buNone/>
             </a:pPr>
             <a:r>
-              <a:rPr lang="en-US" sz="950" b="1" spc="-20" kern="0" dirty="0">
+              <a:rPr lang="en-US" sz="1150" b="1" dirty="0">
                 <a:solidFill>
                   <a:srgbClr val="FFFFFF"/>
                 </a:solidFill>
@@ -7337,9 +7331,445 @@
                 <a:ea typeface="Pretendard" pitchFamily="34" charset="-122"/>
                 <a:cs typeface="Pretendard" pitchFamily="34" charset="-120"/>
               </a:rPr>
-              <a:t>소개비 %와 촬영 지원이 먼저 보입니다</a:t>
-            </a:r>
-            <a:endParaRPr lang="en-US" sz="950" dirty="0"/>
+              <a:t>1</a:t>
+            </a:r>
+            <a:endParaRPr lang="en-US" sz="1150" dirty="0"/>
+          </a:p>
+        </p:txBody>
+      </p:sp>
+      <p:sp>
+        <p:nvSpPr>
+          <p:cNvPr id="30" name="Text 27"/>
+          <p:cNvSpPr txBox="1"/>
+          <p:nvPr/>
+        </p:nvSpPr>
+        <p:spPr>
+          <a:xfrm>
+            <a:off x="9418320" y="2395728"/>
+            <a:ext cx="1858975" cy="274320"/>
+          </a:xfrm>
+          <a:prstGeom prst="rect">
+            <a:avLst/>
+          </a:prstGeom>
+          <a:noFill/>
+          <a:ln/>
+        </p:spPr>
+        <p:txBody>
+          <a:bodyPr wrap="square" lIns="0" tIns="0" rIns="0" bIns="0" rtlCol="0" anchor="ctr"/>
+          <a:lstStyle/>
+          <a:p>
+            <a:pPr indent="0" marL="0">
+              <a:buNone/>
+            </a:pPr>
+            <a:r>
+              <a:rPr lang="en-US" sz="1250" b="1" spc="-30" kern="0" dirty="0">
+                <a:solidFill>
+                  <a:srgbClr val="16181C"/>
+                </a:solidFill>
+                <a:latin typeface="Pretendard" pitchFamily="34" charset="0"/>
+                <a:ea typeface="Pretendard" pitchFamily="34" charset="-122"/>
+                <a:cs typeface="Pretendard" pitchFamily="34" charset="-120"/>
+              </a:rPr>
+              <a:t>가입</a:t>
+            </a:r>
+            <a:endParaRPr lang="en-US" sz="1250" dirty="0"/>
+          </a:p>
+        </p:txBody>
+      </p:sp>
+      <p:sp>
+        <p:nvSpPr>
+          <p:cNvPr id="31" name="Text 28"/>
+          <p:cNvSpPr txBox="1"/>
+          <p:nvPr/>
+        </p:nvSpPr>
+        <p:spPr>
+          <a:xfrm>
+            <a:off x="9418320" y="2670048"/>
+            <a:ext cx="1858975" cy="685800"/>
+          </a:xfrm>
+          <a:prstGeom prst="rect">
+            <a:avLst/>
+          </a:prstGeom>
+          <a:noFill/>
+          <a:ln/>
+        </p:spPr>
+        <p:txBody>
+          <a:bodyPr wrap="square" lIns="0" tIns="0" rIns="0" bIns="0" rtlCol="0" anchor="t"/>
+          <a:lstStyle/>
+          <a:p>
+            <a:pPr indent="0" marL="0">
+              <a:lnSpc>
+                <a:spcPct val="135000"/>
+              </a:lnSpc>
+              <a:buNone/>
+            </a:pPr>
+            <a:r>
+              <a:rPr lang="en-US" sz="980" dirty="0">
+                <a:solidFill>
+                  <a:srgbClr val="16181C"/>
+                </a:solidFill>
+                <a:latin typeface="Pretendard" pitchFamily="34" charset="0"/>
+                <a:ea typeface="Pretendard" pitchFamily="34" charset="-122"/>
+                <a:cs typeface="Pretendard" pitchFamily="34" charset="-120"/>
+              </a:rPr>
+              <a:t>카카오 로그인 한 번. 셀러 대시보드 계정이 따로 필요 없습니다.</a:t>
+            </a:r>
+            <a:endParaRPr lang="en-US" sz="980" dirty="0"/>
+          </a:p>
+        </p:txBody>
+      </p:sp>
+      <p:sp>
+        <p:nvSpPr>
+          <p:cNvPr id="32" name="Shape 29"/>
+          <p:cNvSpPr/>
+          <p:nvPr/>
+        </p:nvSpPr>
+        <p:spPr>
+          <a:xfrm>
+            <a:off x="9006840" y="3474720"/>
+            <a:ext cx="310896" cy="310896"/>
+          </a:xfrm>
+          <a:prstGeom prst="ellipse">
+            <a:avLst/>
+          </a:prstGeom>
+          <a:solidFill>
+            <a:srgbClr val="1C69EF"/>
+          </a:solidFill>
+          <a:ln w="15875">
+            <a:solidFill>
+              <a:srgbClr val="1C69EF"/>
+            </a:solidFill>
+            <a:prstDash val="solid"/>
+          </a:ln>
+        </p:spPr>
+      </p:sp>
+      <p:sp>
+        <p:nvSpPr>
+          <p:cNvPr id="33" name="Text 30"/>
+          <p:cNvSpPr txBox="1"/>
+          <p:nvPr/>
+        </p:nvSpPr>
+        <p:spPr>
+          <a:xfrm>
+            <a:off x="9006840" y="3474720"/>
+            <a:ext cx="310896" cy="310896"/>
+          </a:xfrm>
+          <a:prstGeom prst="rect">
+            <a:avLst/>
+          </a:prstGeom>
+          <a:noFill/>
+          <a:ln/>
+        </p:spPr>
+        <p:txBody>
+          <a:bodyPr wrap="square" lIns="0" tIns="0" rIns="0" bIns="0" rtlCol="0" anchor="ctr"/>
+          <a:lstStyle/>
+          <a:p>
+            <a:pPr algn="ctr" indent="0" marL="0">
+              <a:buNone/>
+            </a:pPr>
+            <a:r>
+              <a:rPr lang="en-US" sz="1150" b="1" dirty="0">
+                <a:solidFill>
+                  <a:srgbClr val="FFFFFF"/>
+                </a:solidFill>
+                <a:latin typeface="Pretendard" pitchFamily="34" charset="0"/>
+                <a:ea typeface="Pretendard" pitchFamily="34" charset="-122"/>
+                <a:cs typeface="Pretendard" pitchFamily="34" charset="-120"/>
+              </a:rPr>
+              <a:t>2</a:t>
+            </a:r>
+            <a:endParaRPr lang="en-US" sz="1150" dirty="0"/>
+          </a:p>
+        </p:txBody>
+      </p:sp>
+      <p:sp>
+        <p:nvSpPr>
+          <p:cNvPr id="34" name="Text 31"/>
+          <p:cNvSpPr txBox="1"/>
+          <p:nvPr/>
+        </p:nvSpPr>
+        <p:spPr>
+          <a:xfrm>
+            <a:off x="9418320" y="3474720"/>
+            <a:ext cx="1858975" cy="274320"/>
+          </a:xfrm>
+          <a:prstGeom prst="rect">
+            <a:avLst/>
+          </a:prstGeom>
+          <a:noFill/>
+          <a:ln/>
+        </p:spPr>
+        <p:txBody>
+          <a:bodyPr wrap="square" lIns="0" tIns="0" rIns="0" bIns="0" rtlCol="0" anchor="ctr"/>
+          <a:lstStyle/>
+          <a:p>
+            <a:pPr indent="0" marL="0">
+              <a:buNone/>
+            </a:pPr>
+            <a:r>
+              <a:rPr lang="en-US" sz="1250" b="1" spc="-30" kern="0" dirty="0">
+                <a:solidFill>
+                  <a:srgbClr val="16181C"/>
+                </a:solidFill>
+                <a:latin typeface="Pretendard" pitchFamily="34" charset="0"/>
+                <a:ea typeface="Pretendard" pitchFamily="34" charset="-122"/>
+                <a:cs typeface="Pretendard" pitchFamily="34" charset="-120"/>
+              </a:rPr>
+              <a:t>매칭</a:t>
+            </a:r>
+            <a:endParaRPr lang="en-US" sz="1250" dirty="0"/>
+          </a:p>
+        </p:txBody>
+      </p:sp>
+      <p:sp>
+        <p:nvSpPr>
+          <p:cNvPr id="35" name="Text 32"/>
+          <p:cNvSpPr txBox="1"/>
+          <p:nvPr/>
+        </p:nvSpPr>
+        <p:spPr>
+          <a:xfrm>
+            <a:off x="9418320" y="3749040"/>
+            <a:ext cx="1858975" cy="685800"/>
+          </a:xfrm>
+          <a:prstGeom prst="rect">
+            <a:avLst/>
+          </a:prstGeom>
+          <a:noFill/>
+          <a:ln/>
+        </p:spPr>
+        <p:txBody>
+          <a:bodyPr wrap="square" lIns="0" tIns="0" rIns="0" bIns="0" rtlCol="0" anchor="t"/>
+          <a:lstStyle/>
+          <a:p>
+            <a:pPr indent="0" marL="0">
+              <a:lnSpc>
+                <a:spcPct val="135000"/>
+              </a:lnSpc>
+              <a:buNone/>
+            </a:pPr>
+            <a:r>
+              <a:rPr lang="en-US" sz="980" dirty="0">
+                <a:solidFill>
+                  <a:srgbClr val="16181C"/>
+                </a:solidFill>
+                <a:latin typeface="Pretendard" pitchFamily="34" charset="0"/>
+                <a:ea typeface="Pretendard" pitchFamily="34" charset="-122"/>
+                <a:cs typeface="Pretendard" pitchFamily="34" charset="-120"/>
+              </a:rPr>
+              <a:t>링크 안의 매장 코드로 그 매장과 바로 연결됩니다. 신청도 승인 대기도 없습니다.</a:t>
+            </a:r>
+            <a:endParaRPr lang="en-US" sz="980" dirty="0"/>
+          </a:p>
+        </p:txBody>
+      </p:sp>
+      <p:sp>
+        <p:nvSpPr>
+          <p:cNvPr id="36" name="Shape 33"/>
+          <p:cNvSpPr/>
+          <p:nvPr/>
+        </p:nvSpPr>
+        <p:spPr>
+          <a:xfrm>
+            <a:off x="9006840" y="4553712"/>
+            <a:ext cx="310896" cy="310896"/>
+          </a:xfrm>
+          <a:prstGeom prst="ellipse">
+            <a:avLst/>
+          </a:prstGeom>
+          <a:solidFill>
+            <a:srgbClr val="1C69EF"/>
+          </a:solidFill>
+          <a:ln w="15875">
+            <a:solidFill>
+              <a:srgbClr val="1C69EF"/>
+            </a:solidFill>
+            <a:prstDash val="solid"/>
+          </a:ln>
+        </p:spPr>
+      </p:sp>
+      <p:sp>
+        <p:nvSpPr>
+          <p:cNvPr id="37" name="Text 34"/>
+          <p:cNvSpPr txBox="1"/>
+          <p:nvPr/>
+        </p:nvSpPr>
+        <p:spPr>
+          <a:xfrm>
+            <a:off x="9006840" y="4553712"/>
+            <a:ext cx="310896" cy="310896"/>
+          </a:xfrm>
+          <a:prstGeom prst="rect">
+            <a:avLst/>
+          </a:prstGeom>
+          <a:noFill/>
+          <a:ln/>
+        </p:spPr>
+        <p:txBody>
+          <a:bodyPr wrap="square" lIns="0" tIns="0" rIns="0" bIns="0" rtlCol="0" anchor="ctr"/>
+          <a:lstStyle/>
+          <a:p>
+            <a:pPr algn="ctr" indent="0" marL="0">
+              <a:buNone/>
+            </a:pPr>
+            <a:r>
+              <a:rPr lang="en-US" sz="1150" b="1" dirty="0">
+                <a:solidFill>
+                  <a:srgbClr val="FFFFFF"/>
+                </a:solidFill>
+                <a:latin typeface="Pretendard" pitchFamily="34" charset="0"/>
+                <a:ea typeface="Pretendard" pitchFamily="34" charset="-122"/>
+                <a:cs typeface="Pretendard" pitchFamily="34" charset="-120"/>
+              </a:rPr>
+              <a:t>3</a:t>
+            </a:r>
+            <a:endParaRPr lang="en-US" sz="1150" dirty="0"/>
+          </a:p>
+        </p:txBody>
+      </p:sp>
+      <p:sp>
+        <p:nvSpPr>
+          <p:cNvPr id="38" name="Text 35"/>
+          <p:cNvSpPr txBox="1"/>
+          <p:nvPr/>
+        </p:nvSpPr>
+        <p:spPr>
+          <a:xfrm>
+            <a:off x="9418320" y="4553712"/>
+            <a:ext cx="1858975" cy="274320"/>
+          </a:xfrm>
+          <a:prstGeom prst="rect">
+            <a:avLst/>
+          </a:prstGeom>
+          <a:noFill/>
+          <a:ln/>
+        </p:spPr>
+        <p:txBody>
+          <a:bodyPr wrap="square" lIns="0" tIns="0" rIns="0" bIns="0" rtlCol="0" anchor="ctr"/>
+          <a:lstStyle/>
+          <a:p>
+            <a:pPr indent="0" marL="0">
+              <a:buNone/>
+            </a:pPr>
+            <a:r>
+              <a:rPr lang="en-US" sz="1250" b="1" spc="-30" kern="0" dirty="0">
+                <a:solidFill>
+                  <a:srgbClr val="16181C"/>
+                </a:solidFill>
+                <a:latin typeface="Pretendard" pitchFamily="34" charset="0"/>
+                <a:ea typeface="Pretendard" pitchFamily="34" charset="-122"/>
+                <a:cs typeface="Pretendard" pitchFamily="34" charset="-120"/>
+              </a:rPr>
+              <a:t>매장 링크</a:t>
+            </a:r>
+            <a:endParaRPr lang="en-US" sz="1250" dirty="0"/>
+          </a:p>
+        </p:txBody>
+      </p:sp>
+      <p:sp>
+        <p:nvSpPr>
+          <p:cNvPr id="39" name="Text 36"/>
+          <p:cNvSpPr txBox="1"/>
+          <p:nvPr/>
+        </p:nvSpPr>
+        <p:spPr>
+          <a:xfrm>
+            <a:off x="9418320" y="4828032"/>
+            <a:ext cx="1858975" cy="685800"/>
+          </a:xfrm>
+          <a:prstGeom prst="rect">
+            <a:avLst/>
+          </a:prstGeom>
+          <a:noFill/>
+          <a:ln/>
+        </p:spPr>
+        <p:txBody>
+          <a:bodyPr wrap="square" lIns="0" tIns="0" rIns="0" bIns="0" rtlCol="0" anchor="t"/>
+          <a:lstStyle/>
+          <a:p>
+            <a:pPr indent="0" marL="0">
+              <a:lnSpc>
+                <a:spcPct val="135000"/>
+              </a:lnSpc>
+              <a:buNone/>
+            </a:pPr>
+            <a:r>
+              <a:rPr lang="en-US" sz="980" dirty="0">
+                <a:solidFill>
+                  <a:srgbClr val="16181C"/>
+                </a:solidFill>
+                <a:latin typeface="Pretendard" pitchFamily="34" charset="0"/>
+                <a:ea typeface="Pretendard" pitchFamily="34" charset="-122"/>
+                <a:cs typeface="Pretendard" pitchFamily="34" charset="-120"/>
+              </a:rPr>
+              <a:t>마이페이지에 그 매장의 고유 링크. 복사, 카톡 공유, 이용권이 바뀌어도 그대로.</a:t>
+            </a:r>
+            <a:endParaRPr lang="en-US" sz="980" dirty="0"/>
+          </a:p>
+        </p:txBody>
+      </p:sp>
+      <p:sp>
+        <p:nvSpPr>
+          <p:cNvPr id="40" name="Shape 37"/>
+          <p:cNvSpPr/>
+          <p:nvPr/>
+        </p:nvSpPr>
+        <p:spPr>
+          <a:xfrm>
+            <a:off x="9006840" y="5596128"/>
+            <a:ext cx="2224735" cy="0"/>
+          </a:xfrm>
+          <a:prstGeom prst="line">
+            <a:avLst/>
+          </a:prstGeom>
+          <a:noFill/>
+          <a:ln w="9525">
+            <a:solidFill>
+              <a:srgbClr val="E6E2DE"/>
+            </a:solidFill>
+            <a:prstDash val="solid"/>
+          </a:ln>
+        </p:spPr>
+      </p:sp>
+      <p:sp>
+        <p:nvSpPr>
+          <p:cNvPr id="41" name="Text 38"/>
+          <p:cNvSpPr txBox="1"/>
+          <p:nvPr/>
+        </p:nvSpPr>
+        <p:spPr>
+          <a:xfrm>
+            <a:off x="9006840" y="5650992"/>
+            <a:ext cx="2224735" cy="457200"/>
+          </a:xfrm>
+          <a:prstGeom prst="rect">
+            <a:avLst/>
+          </a:prstGeom>
+          <a:noFill/>
+          <a:ln/>
+        </p:spPr>
+        <p:txBody>
+          <a:bodyPr wrap="square" lIns="0" tIns="0" rIns="0" bIns="0" rtlCol="0" anchor="t"/>
+          <a:lstStyle/>
+          <a:p>
+            <a:pPr indent="0" marL="0">
+              <a:lnSpc>
+                <a:spcPct val="135000"/>
+              </a:lnSpc>
+              <a:buNone/>
+            </a:pPr>
+            <a:r>
+              <a:rPr lang="en-US" sz="900" dirty="0">
+                <a:solidFill>
+                  <a:srgbClr val="6E6B68"/>
+                </a:solidFill>
+                <a:latin typeface="Pretendard" pitchFamily="34" charset="0"/>
+                <a:ea typeface="Pretendard" pitchFamily="34" charset="-122"/>
+                <a:cs typeface="Pretendard" pitchFamily="34" charset="-120"/>
+              </a:rPr>
+              <a:t>코드는 매장당 하나. 코드를 만든 대행사가 아니라 입력하는 사람이 연결됩니다.</a:t>
+            </a:r>
+            <a:endParaRPr lang="en-US" sz="900" dirty="0"/>
           </a:p>
         </p:txBody>
       </p:sp>
@@ -7594,7 +8024,7 @@
                 <a:ea typeface="Pretendard" pitchFamily="34" charset="-122"/>
                 <a:cs typeface="Pretendard" pitchFamily="34" charset="-120"/>
               </a:rPr>
-              <a:t>사장님을 설득하는 일이 아니라, 열어 두면 손해 볼 게 없다는 것을 알려 드리는 일에 가깝습니다. 소개비 %를 사장님과 정하고, 내 계정에서 매장을 등록하면 됩니다.</a:t>
+              <a:t>사장님을 설득하는 일이 아니라, 열어 두면 손해 볼 게 없다는 것을 알려 드리는 일에 가깝습니다. 내 계정에서 매장을 등록하면 매장 코드가 생기고, 사장님은 그 코드로 가입해 주인이 됩니다.</a:t>
             </a:r>
             <a:endParaRPr lang="en-US" sz="1250" dirty="0"/>
           </a:p>
@@ -7830,7 +8260,27 @@
                 <a:ea typeface="Pretendard" pitchFamily="34" charset="-122"/>
                 <a:cs typeface="Pretendard" pitchFamily="34" charset="-120"/>
               </a:rPr>
-              <a:t>사장님과 소개비 %를 정한다</a:t>
+              <a:t>중개사 계정으로 등록한다</a:t>
+            </a:r>
+            <a:endParaRPr lang="en-US" sz="1200" dirty="0"/>
+          </a:p>
+          <a:p>
+            <a:pPr indent="0" marL="0">
+              <a:lnSpc>
+                <a:spcPct val="120000"/>
+              </a:lnSpc>
+              <a:buNone/>
+            </a:pPr>
+            <a:r>
+              <a:rPr lang="en-US" sz="1200" b="1" spc="-30" kern="0" dirty="0">
+                <a:solidFill>
+                  <a:srgbClr val="16181C"/>
+                </a:solidFill>
+                <a:latin typeface="Pretendard" pitchFamily="34" charset="0"/>
+                <a:ea typeface="Pretendard" pitchFamily="34" charset="-122"/>
+                <a:cs typeface="Pretendard" pitchFamily="34" charset="-120"/>
+              </a:rPr>
+              <a:t>(코드 자동 생성)</a:t>
             </a:r>
             <a:endParaRPr lang="en-US" sz="1200" dirty="0"/>
           </a:p>
@@ -7960,7 +8410,7 @@
                 <a:ea typeface="Pretendard" pitchFamily="34" charset="-122"/>
                 <a:cs typeface="Pretendard" pitchFamily="34" charset="-120"/>
               </a:rPr>
-              <a:t>중개사 계정으로 매장을 등록한다</a:t>
+              <a:t>사장님께 코드를 드린다</a:t>
             </a:r>
             <a:endParaRPr lang="en-US" sz="1200" dirty="0"/>
           </a:p>
@@ -8132,7 +8582,7 @@
                 <a:ea typeface="Pretendard" pitchFamily="34" charset="-122"/>
                 <a:cs typeface="Pretendard" pitchFamily="34" charset="-120"/>
               </a:rPr>
-              <a:t>등록은 셀러 대시보드의 매장 등록에서 "중개·대행사에요" 를 고르면 됩니다. 사업자 확인은 사장님 정보로 하고, 이용권 등록과 딜 관리는 내 계정에서 합니다.</a:t>
+              <a:t>셀러 대시보드의 매장 등록에서 "중개·대행사에요" 를 고르면 매장 코드가 자동으로 생기고, 중개사 몫 %와 인플루언서 소개비 %를 함께 정합니다. 사장님이 가입하며 그 코드를 넣으면 매장 주인이 되고, 나는 운영자로 남습니다. 등록증 확인은 그대로입니다.</a:t>
             </a:r>
             <a:endParaRPr lang="en-US" sz="1050" dirty="0"/>
           </a:p>
@@ -8350,7 +8800,7 @@
                 <a:ea typeface="Pretendard" pitchFamily="34" charset="-122"/>
                 <a:cs typeface="Pretendard" pitchFamily="34" charset="-120"/>
               </a:rPr>
-              <a:t>소개비는 사장님과 제가 정해요. </a:t>
+              <a:t>제 몫과 소개비는 등록할 때 정해요. </a:t>
             </a:r>
             <a:pPr indent="0" marL="0">
               <a:buNone/>
@@ -8364,7 +8814,7 @@
                 <a:ea typeface="Pretendard" pitchFamily="34" charset="-122"/>
                 <a:cs typeface="Pretendard" pitchFamily="34" charset="-120"/>
               </a:rPr>
-              <a:t>미리 나가는 광고비가 없습니다.</a:t>
+              <a:t>사장님 몫 95% 안에서. 유어딜이 각자에게 보냅니다.</a:t>
             </a:r>
             <a:endParaRPr lang="en-US" sz="1100" dirty="0"/>
           </a:p>
@@ -8603,7 +9053,7 @@
                 <a:ea typeface="Pretendard" pitchFamily="34" charset="-122"/>
                 <a:cs typeface="Pretendard" pitchFamily="34" charset="-120"/>
               </a:rPr>
-              <a:t>소개비는 그 안에서</a:t>
+              <a:t>두 %는 등록할 때</a:t>
             </a:r>
             <a:endParaRPr lang="en-US" sz="1100" dirty="0"/>
           </a:p>
@@ -8645,7 +9095,7 @@
                 <a:ea typeface="Pretendard" pitchFamily="34" charset="-122"/>
                 <a:cs typeface="Pretendard" pitchFamily="34" charset="-120"/>
               </a:rPr>
-              <a:t>95% 안에서 사장님과 정한 %가 내 몫. 유어딜이 대신 정산합니다.</a:t>
+              <a:t>중개사 몫 %와 소개비 %를 등록하며 정합니다. 둘 다 유어딜이 직접 보냅니다.</a:t>
             </a:r>
             <a:endParaRPr lang="en-US" sz="950" dirty="0"/>
           </a:p>
@@ -8684,7 +9134,7 @@
                 <a:ea typeface="Pretendard" pitchFamily="34" charset="-122"/>
                 <a:cs typeface="Pretendard" pitchFamily="34" charset="-120"/>
               </a:rPr>
-              <a:t>운영은 내 계정에서</a:t>
+              <a:t>코드는 사장님이 입력</a:t>
             </a:r>
             <a:endParaRPr lang="en-US" sz="1100" dirty="0"/>
           </a:p>
@@ -8726,7 +9176,7 @@
                 <a:ea typeface="Pretendard" pitchFamily="34" charset="-122"/>
                 <a:cs typeface="Pretendard" pitchFamily="34" charset="-120"/>
               </a:rPr>
-              <a:t>이용권 등록과 딜 관리는 중개사 계정에서. 사장님은 매장에서 QR 확인만 합니다.</a:t>
+              <a:t>사장님이 가입하며 코드를 넣어야 주인이 됩니다. 첫 정산 전까지만. 판매는 그 전에도 됩니다.</a:t>
             </a:r>
             <a:endParaRPr lang="en-US" sz="950" dirty="0"/>
           </a:p>
@@ -9537,7 +9987,7 @@
                 <a:ea typeface="Pretendard" pitchFamily="34" charset="-122"/>
                 <a:cs typeface="Pretendard" pitchFamily="34" charset="-120"/>
               </a:rPr>
-              <a:t>유효기간 동안 계속. 딜이 있는 이용권은 소개비가 붙습니다</a:t>
+              <a:t>유효기간 동안 계속. 매칭된 매장의 이용권은 소개비가 붙습니다</a:t>
             </a:r>
             <a:endParaRPr lang="en-US" sz="980" dirty="0"/>
           </a:p>
@@ -9957,7 +10407,7 @@
                 <a:ea typeface="Pretendard" pitchFamily="34" charset="-122"/>
                 <a:cs typeface="Pretendard" pitchFamily="34" charset="-120"/>
               </a:rPr>
-              <a:t>딜이 있으면 여기서도 소개비</a:t>
+              <a:t>매칭된 매장이면 여기서도 소개비</a:t>
             </a:r>
             <a:endParaRPr lang="en-US" sz="1250" dirty="0"/>
           </a:p>
@@ -9999,7 +10449,7 @@
                 <a:ea typeface="Pretendard" pitchFamily="34" charset="-122"/>
                 <a:cs typeface="Pretendard" pitchFamily="34" charset="-120"/>
               </a:rPr>
-              <a:t>영상 자체에 대한 몫은 없고, 그 이용권에 매장과 맺은 딜이 있을 때 붙습니다</a:t>
+              <a:t>영상 자체에 대한 몫은 없고, 그 이용권의 매장과 매칭돼 있을 때 붙습니다</a:t>
             </a:r>
             <a:endParaRPr lang="en-US" sz="980" dirty="0"/>
           </a:p>
@@ -12401,7 +12851,7 @@
                 <a:ea typeface="Pretendard" pitchFamily="34" charset="-122"/>
                 <a:cs typeface="Pretendard" pitchFamily="34" charset="-120"/>
               </a:rPr>
-              <a:t>외부 채널 없이도 딜이 있으면 소개비가 붙습니다</a:t>
+              <a:t>매칭된 매장이면 외부 채널 없이도 소개비가 붙습니다</a:t>
             </a:r>
             <a:endParaRPr lang="en-US" sz="1020" dirty="0"/>
           </a:p>
@@ -12764,7 +13214,7 @@
                 <a:ea typeface="Pretendard" pitchFamily="34" charset="-122"/>
                 <a:cs typeface="Pretendard" pitchFamily="34" charset="-120"/>
               </a:rPr>
-              <a:t>링크로 귀속</a:t>
+              <a:t>매장 링크로 귀속</a:t>
             </a:r>
             <a:endParaRPr lang="en-US" sz="1250" dirty="0"/>
           </a:p>
@@ -12806,7 +13256,7 @@
                 <a:ea typeface="Pretendard" pitchFamily="34" charset="-122"/>
                 <a:cs typeface="Pretendard" pitchFamily="34" charset="-120"/>
               </a:rPr>
-              <a:t>내 링크로 들어온 주문에 자동으로 연결됩니다. 코드를 확인할 일이 없습니다.</a:t>
+              <a:t>내 매장 링크로 들어온 주문에 자동으로 연결됩니다. 이용권이 바뀌어도 링크는 그대로라 다시 받을 일이 없습니다.</a:t>
             </a:r>
             <a:endParaRPr lang="en-US" sz="1000" dirty="0"/>
           </a:p>
@@ -13465,7 +13915,7 @@
                 <a:ea typeface="Pretendard" pitchFamily="34" charset="-122"/>
                 <a:cs typeface="Pretendard" pitchFamily="34" charset="-120"/>
               </a:rPr>
-              <a:t>내 정산 화면 (예시 데이터)</a:t>
+              <a:t>마이페이지 정산 화면 (예시 데이터)</a:t>
             </a:r>
             <a:endParaRPr lang="en-US" sz="1050" dirty="0"/>
           </a:p>
@@ -13722,7 +14172,7 @@
                 <a:ea typeface="Pretendard" pitchFamily="34" charset="-122"/>
                 <a:cs typeface="Pretendard" pitchFamily="34" charset="-120"/>
               </a:rPr>
-              <a:t>체험단은 한 번 받고 끝나지만, 유어딜은 내 유어샵과 링크가 남고 매장과 맺은 딜이 계속 쌓입니다. 자주 묻는 질문에 먼저 답해 두었습니다.</a:t>
+              <a:t>체험단은 한 번 받고 끝나지만, 유어딜은 내 유어샵과 매장 링크가 남고 매칭된 매장이 계속 쌓입니다. 자주 묻는 질문에 먼저 답해 두었습니다.</a:t>
             </a:r>
             <a:endParaRPr lang="en-US" sz="1250" dirty="0"/>
           </a:p>
@@ -14067,7 +14517,7 @@
                 <a:ea typeface="Pretendard" pitchFamily="34" charset="-122"/>
                 <a:cs typeface="Pretendard" pitchFamily="34" charset="-120"/>
               </a:rPr>
-              <a:t>자유입니다. 제안에 조건이 붙어 있으면 그 조건을 지켜야 그 소개비가 발효됩니다.</a:t>
+              <a:t>자유입니다. 스토리, 릴스, 블로그 글, 유어쇼츠 어디든 매장 링크 하나면 됩니다.</a:t>
             </a:r>
             <a:endParaRPr lang="en-US" sz="1050" dirty="0"/>
           </a:p>
@@ -14182,7 +14632,7 @@
                 <a:ea typeface="Pretendard" pitchFamily="34" charset="-122"/>
                 <a:cs typeface="Pretendard" pitchFamily="34" charset="-120"/>
               </a:rPr>
-              <a:t>있습니다. 매장과 맺은 딜이 없는 이용권은 담아 둘 수는 있지만 소개비가 0 입니다.</a:t>
+              <a:t>있습니다. 매칭되지 않은 매장의 이용권은 담아 둘 수는 있지만 소개비가 0 입니다.</a:t>
             </a:r>
             <a:endParaRPr lang="en-US" sz="1050" dirty="0"/>
           </a:p>
@@ -14370,7 +14820,7 @@
                 <a:ea typeface="Pretendard" pitchFamily="34" charset="-122"/>
                 <a:cs typeface="Pretendard" pitchFamily="34" charset="-120"/>
               </a:rPr>
-              <a:t>제안은 어떻게 오나요?</a:t>
+              <a:t>매칭은 어떻게 되나요?</a:t>
             </a:r>
             <a:endParaRPr lang="en-US" sz="1250" dirty="0"/>
           </a:p>
@@ -14412,7 +14862,7 @@
                 <a:ea typeface="Pretendard" pitchFamily="34" charset="-122"/>
                 <a:cs typeface="Pretendard" pitchFamily="34" charset="-120"/>
               </a:rPr>
-              <a:t>매장은 내가 공개해 둔 소개자 프로필을 보고 직접 보냅니다. 아는 가게가 있으면 중개사 계정으로 직접 등록해도 됩니다. 둘 다 해 두는 것이 빠릅니다.</a:t>
+              <a:t>대행사(중개사)가 보낸 링크를 탭하면 가입과 동시에 매칭됩니다. 직접 왔다면 마이페이지에서 매장 코드를 입력하면 됩니다. 아는 가게가 있으면 중개사 계정으로 직접 등록해도 됩니다.</a:t>
             </a:r>
             <a:endParaRPr lang="en-US" sz="1050" dirty="0"/>
           </a:p>
@@ -14735,7 +15185,7 @@
                 <a:ea typeface="Pretendard" pitchFamily="34" charset="-122"/>
                 <a:cs typeface="Pretendard" pitchFamily="34" charset="-120"/>
               </a:rPr>
-              <a:t>경로 A · 제안을 받는다</a:t>
+              <a:t>경로 A · 링크로 시작한다</a:t>
             </a:r>
             <a:endParaRPr lang="en-US" sz="1250" dirty="0"/>
           </a:p>
@@ -14875,7 +15325,7 @@
                 <a:ea typeface="Pretendard" pitchFamily="34" charset="-122"/>
                 <a:cs typeface="Pretendard" pitchFamily="34" charset="-120"/>
               </a:rPr>
-              <a:t>셀러 대시보드에 인플루언서(중개사) 자격으로 가입</a:t>
+              <a:t>대행사(중개사)가 보낸 코드 링크를 탭</a:t>
             </a:r>
             <a:endParaRPr lang="en-US" sz="1030" dirty="0"/>
           </a:p>
@@ -14981,7 +15431,7 @@
                 <a:ea typeface="Pretendard" pitchFamily="34" charset="-122"/>
                 <a:cs typeface="Pretendard" pitchFamily="34" charset="-120"/>
               </a:rPr>
-              <a:t>카카오 로그인 뒤 소개자 프로필 공개</a:t>
+              <a:t>카카오 로그인으로 가입, 그 순간 매칭</a:t>
             </a:r>
             <a:endParaRPr lang="en-US" sz="1030" dirty="0"/>
           </a:p>
@@ -15087,7 +15537,7 @@
                 <a:ea typeface="Pretendard" pitchFamily="34" charset="-122"/>
                 <a:cs typeface="Pretendard" pitchFamily="34" charset="-120"/>
               </a:rPr>
-              <a:t>매장 제안 수신 (소개비 %, 촬영 지원)</a:t>
+              <a:t>(직접 왔다면 마이페이지에서 코드 입력)</a:t>
             </a:r>
             <a:endParaRPr lang="en-US" sz="1030" dirty="0"/>
           </a:p>
@@ -15193,7 +15643,7 @@
                 <a:ea typeface="Pretendard" pitchFamily="34" charset="-122"/>
                 <a:cs typeface="Pretendard" pitchFamily="34" charset="-120"/>
               </a:rPr>
-              <a:t>수락하면 전용 링크 발급</a:t>
+              <a:t>마이페이지에 매장 단위 링크 생성</a:t>
             </a:r>
             <a:endParaRPr lang="en-US" sz="1030" dirty="0"/>
           </a:p>
@@ -15299,7 +15749,7 @@
                 <a:ea typeface="Pretendard" pitchFamily="34" charset="-122"/>
                 <a:cs typeface="Pretendard" pitchFamily="34" charset="-120"/>
               </a:rPr>
-              <a:t>콘텐츠와 유어샵에 링크</a:t>
+              <a:t>콘텐츠와 유어샵에 링크 (복사·카톡 공유)</a:t>
             </a:r>
             <a:endParaRPr lang="en-US" sz="1030" dirty="0"/>
           </a:p>
@@ -15405,7 +15855,7 @@
                 <a:ea typeface="Pretendard" pitchFamily="34" charset="-122"/>
                 <a:cs typeface="Pretendard" pitchFamily="34" charset="-120"/>
               </a:rPr>
-              <a:t>정산 화면에서 주문·확정 확인</a:t>
+              <a:t>마이페이지에서 주문·확정 확인</a:t>
             </a:r>
             <a:endParaRPr lang="en-US" sz="1030" dirty="0"/>
           </a:p>
@@ -15470,7 +15920,7 @@
                 <a:ea typeface="Pretendard" pitchFamily="34" charset="-122"/>
                 <a:cs typeface="Pretendard" pitchFamily="34" charset="-120"/>
               </a:rPr>
-              <a:t>수락 전까지 아무 의무도 없습니다</a:t>
+              <a:t>소개비 %는 매장 등록 때 정해진 값</a:t>
             </a:r>
             <a:endParaRPr lang="en-US" sz="950" dirty="0"/>
           </a:p>
@@ -15782,7 +16232,7 @@
                 <a:ea typeface="Pretendard" pitchFamily="34" charset="-122"/>
                 <a:cs typeface="Pretendard" pitchFamily="34" charset="-120"/>
               </a:rPr>
-              <a:t>사장님과 소개비 %를 정한다</a:t>
+              <a:t>중개사 계정으로 등록 (유어딜 5%) → 매장 코드 자동 생성</a:t>
             </a:r>
             <a:endParaRPr lang="en-US" sz="1030" dirty="0"/>
           </a:p>
@@ -15888,7 +16338,7 @@
                 <a:ea typeface="Pretendard" pitchFamily="34" charset="-122"/>
                 <a:cs typeface="Pretendard" pitchFamily="34" charset="-120"/>
               </a:rPr>
-              <a:t>중개사 계정으로 매장을 등록한다 (유어딜 5%)</a:t>
+              <a:t>중개사 몫 %와 소개비 %를 그때 정한다</a:t>
             </a:r>
             <a:endParaRPr lang="en-US" sz="1030" dirty="0"/>
           </a:p>
@@ -15994,7 +16444,7 @@
                 <a:ea typeface="Pretendard" pitchFamily="34" charset="-122"/>
                 <a:cs typeface="Pretendard" pitchFamily="34" charset="-120"/>
               </a:rPr>
-              <a:t>이용권을 올리고 딜을 건다</a:t>
+              <a:t>사장님이 가입하며 코드 입력 → 매장 주인</a:t>
             </a:r>
             <a:endParaRPr lang="en-US" sz="1030" dirty="0"/>
           </a:p>
@@ -16100,7 +16550,7 @@
                 <a:ea typeface="Pretendard" pitchFamily="34" charset="-122"/>
                 <a:cs typeface="Pretendard" pitchFamily="34" charset="-120"/>
               </a:rPr>
-              <a:t>내 링크와 유어샵으로 판다</a:t>
+              <a:t>이용권을 올리고 내 링크로 판다</a:t>
             </a:r>
             <a:endParaRPr lang="en-US" sz="1030" dirty="0"/>
           </a:p>
@@ -16206,7 +16656,7 @@
                 <a:ea typeface="Pretendard" pitchFamily="34" charset="-122"/>
                 <a:cs typeface="Pretendard" pitchFamily="34" charset="-120"/>
               </a:rPr>
-              <a:t>정산 화면에서 확인</a:t>
+              <a:t>마이페이지·대시보드에서 확인</a:t>
             </a:r>
             <a:endParaRPr lang="en-US" sz="1030" dirty="0"/>
           </a:p>
@@ -16271,7 +16721,7 @@
                 <a:ea typeface="Pretendard" pitchFamily="34" charset="-122"/>
                 <a:cs typeface="Pretendard" pitchFamily="34" charset="-120"/>
               </a:rPr>
-              <a:t>유어딜 수수료 5%. 사장님 몫 95% 안에서 소개비</a:t>
+              <a:t>중개사 몫도 유어딜이 직접 보냅니다</a:t>
             </a:r>
             <a:endParaRPr lang="en-US" sz="950" dirty="0"/>
           </a:p>
@@ -16477,7 +16927,7 @@
                 <a:ea typeface="Pretendard" pitchFamily="34" charset="-122"/>
                 <a:cs typeface="Pretendard" pitchFamily="34" charset="-120"/>
               </a:rPr>
-              <a:t>링크로 들어온 주문에 자동 귀속</a:t>
+              <a:t>매장 링크로 들어온 주문에 자동 귀속</a:t>
             </a:r>
             <a:endParaRPr lang="en-US" sz="1030" dirty="0"/>
           </a:p>
@@ -17431,7 +17881,7 @@
                 <a:ea typeface="Pretendard" pitchFamily="34" charset="-122"/>
                 <a:cs typeface="Pretendard" pitchFamily="34" charset="-120"/>
               </a:rPr>
-              <a:t>판매가 기준, 매장이 딜마다 제안</a:t>
+              <a:t>판매가 기준, 매장 등록 때 정한 값</a:t>
             </a:r>
             <a:endParaRPr lang="en-US" sz="1000" dirty="0"/>
           </a:p>
@@ -17672,7 +18122,7 @@
         <p:spPr>
           <a:xfrm>
             <a:off x="8001000" y="5019142"/>
-            <a:ext cx="3025521" cy="274320"/>
+            <a:ext cx="3242691" cy="274320"/>
           </a:xfrm>
           <a:prstGeom prst="roundRect">
             <a:avLst>
@@ -17706,7 +18156,7 @@
         <p:spPr>
           <a:xfrm>
             <a:off x="8001000" y="5019142"/>
-            <a:ext cx="3025521" cy="274320"/>
+            <a:ext cx="3242691" cy="274320"/>
           </a:xfrm>
           <a:prstGeom prst="rect">
             <a:avLst/>
@@ -17730,7 +18180,7 @@
                 <a:ea typeface="Pretendard" pitchFamily="34" charset="-122"/>
                 <a:cs typeface="Pretendard" pitchFamily="34" charset="-120"/>
               </a:rPr>
-              <a:t>영상 아래에서 바로 결제, 딜이 있으면 소개비</a:t>
+              <a:t>영상 아래에서 바로 결제, 매칭된 매장이면 소개비</a:t>
             </a:r>
             <a:endParaRPr lang="en-US" sz="950" dirty="0"/>
           </a:p>
@@ -17987,7 +18437,7 @@
                 <a:ea typeface="Pretendard" pitchFamily="34" charset="-122"/>
                 <a:cs typeface="Pretendard" pitchFamily="34" charset="-120"/>
               </a:rPr>
-              <a:t>수락하기 전까지 아무 의무도 생기지 않습니다. 조건을 보고 마음에 들지 않으면 수락하지 않으면 됩니다.</a:t>
+              <a:t>링크 한 번으로 시작하고, 매장이 늘수록 링크가 늘어납니다. 내가 내는 돈은 없습니다.</a:t>
             </a:r>
             <a:endParaRPr lang="en-US" sz="1250" dirty="0"/>
           </a:p>
@@ -18090,7 +18540,7 @@
                 <a:ea typeface="Pretendard" pitchFamily="34" charset="-122"/>
                 <a:cs typeface="Pretendard" pitchFamily="34" charset="-120"/>
               </a:rPr>
-              <a:t>가입</a:t>
+              <a:t>링크 또는 코드</a:t>
             </a:r>
             <a:endParaRPr lang="en-US" sz="1250" dirty="0"/>
           </a:p>
@@ -18129,7 +18579,7 @@
                 <a:ea typeface="Pretendard" pitchFamily="34" charset="-122"/>
                 <a:cs typeface="Pretendard" pitchFamily="34" charset="-120"/>
               </a:rPr>
-              <a:t>셀러 대시보드에 인플루언서(중개사) 자격으로 가입하고, 내 정산 화면에서 소개자 프로필을 공개합니다.</a:t>
+              <a:t>대행사가 보낸 링크를 탭하거나, 마이페이지에서 매장 코드를 입력합니다. 가입과 매칭이 한 번에 됩니다.</a:t>
             </a:r>
             <a:endParaRPr lang="en-US" sz="1050" dirty="0"/>
           </a:p>
@@ -18232,7 +18682,7 @@
                 <a:ea typeface="Pretendard" pitchFamily="34" charset="-122"/>
                 <a:cs typeface="Pretendard" pitchFamily="34" charset="-120"/>
               </a:rPr>
-              <a:t>제안 수신 · 매장 섭외</a:t>
+              <a:t>매장 섭외</a:t>
             </a:r>
             <a:endParaRPr lang="en-US" sz="1250" dirty="0"/>
           </a:p>
@@ -18271,7 +18721,7 @@
                 <a:ea typeface="Pretendard" pitchFamily="34" charset="-122"/>
                 <a:cs typeface="Pretendard" pitchFamily="34" charset="-120"/>
               </a:rPr>
-              <a:t>조건이 맞는 매장의 제안을 받거나, 아는 가게를 중개사 계정으로 직접 등록합니다.</a:t>
+              <a:t>아는 가게가 있으면 중개사 계정으로 등록합니다. 코드가 생기고, 사장님은 그 코드로 가입해 주인이 됩니다.</a:t>
             </a:r>
             <a:endParaRPr lang="en-US" sz="1050" dirty="0"/>
           </a:p>
@@ -18413,7 +18863,7 @@
                 <a:ea typeface="Pretendard" pitchFamily="34" charset="-122"/>
                 <a:cs typeface="Pretendard" pitchFamily="34" charset="-120"/>
               </a:rPr>
-              <a:t>링크를 걸고, 성과와 정산은 내 정산 화면에서 확인합니다.</a:t>
+              <a:t>매장 링크를 걸고, 적립과 정산은 마이페이지에서 확인합니다.</a:t>
             </a:r>
             <a:endParaRPr lang="en-US" sz="1050" dirty="0"/>
           </a:p>
@@ -22588,7 +23038,7 @@
                 <a:ea typeface="Pretendard" pitchFamily="34" charset="-122"/>
                 <a:cs typeface="Pretendard" pitchFamily="34" charset="-120"/>
               </a:rPr>
-              <a:t>소개비 %는 매장과 정하고, 내 링크로 팔린 건마다 쌓입니다</a:t>
+              <a:t>중개사 몫 %와 소개비 %는 등록 때 정하고, 사장님은 매장 코드로 가입해 주인이 됩니다</a:t>
             </a:r>
             <a:endParaRPr lang="en-US" sz="1050" dirty="0"/>
           </a:p>
@@ -24342,7 +24792,7 @@
                 <a:ea typeface="Pretendard" pitchFamily="34" charset="-122"/>
                 <a:cs typeface="Pretendard" pitchFamily="34" charset="-120"/>
               </a:rPr>
-              <a:t>매장이 딜마다 제안한 비율.</a:t>
+              <a:t>매장 등록 때 정한 비율.</a:t>
             </a:r>
             <a:endParaRPr lang="en-US" sz="950" dirty="0"/>
           </a:p>
@@ -24362,7 +24812,7 @@
                 <a:ea typeface="Pretendard" pitchFamily="34" charset="-122"/>
                 <a:cs typeface="Pretendard" pitchFamily="34" charset="-120"/>
               </a:rPr>
-              <a:t>내 링크로 팔린 건마다,</a:t>
+              <a:t>내 매장 링크로 팔린 건마다,</a:t>
             </a:r>
             <a:endParaRPr lang="en-US" sz="950" dirty="0"/>
           </a:p>
@@ -24497,7 +24947,7 @@
                 <a:ea typeface="Pretendard" pitchFamily="34" charset="-122"/>
                 <a:cs typeface="Pretendard" pitchFamily="34" charset="-120"/>
               </a:rPr>
-              <a:t>플랫폼이 정한 고정 요율이 아닙니다. 매장이 딜마다 제안한 비율이 그대로 적립되고, 유어딜이 중간에서 깎지 않습니다.</a:t>
+              <a:t>플랫폼이 정한 고정 요율이 아닙니다. 매장을 등록할 때 정한 비율이 그대로 적립되고, 유어딜이 중간에서 깎지 않습니다.</a:t>
             </a:r>
             <a:endParaRPr lang="en-US" sz="950" dirty="0"/>
           </a:p>
@@ -24949,7 +25399,7 @@
                 <a:ea typeface="Pretendard" pitchFamily="34" charset="-122"/>
                 <a:cs typeface="Pretendard" pitchFamily="34" charset="-120"/>
               </a:rPr>
-              <a:t>주문마다 붙는 딜 소개비</a:t>
+              <a:t>매칭된 매장의 이용권 소개비</a:t>
             </a:r>
             <a:endParaRPr lang="en-US" sz="1450" dirty="0"/>
           </a:p>
@@ -24988,7 +25438,7 @@
                 <a:ea typeface="Pretendard" pitchFamily="34" charset="-122"/>
                 <a:cs typeface="Pretendard" pitchFamily="34" charset="-120"/>
               </a:rPr>
-              <a:t>결제 금액 × 매장이 제안한 %</a:t>
+              <a:t>결제 금액 × 매장 등록 때 정한 %</a:t>
             </a:r>
             <a:endParaRPr lang="en-US" sz="1100" dirty="0"/>
           </a:p>
@@ -25030,7 +25480,7 @@
                 <a:ea typeface="Pretendard" pitchFamily="34" charset="-122"/>
                 <a:cs typeface="Pretendard" pitchFamily="34" charset="-120"/>
               </a:rPr>
-              <a:t>매장이 "이 이용권 팔아 주면 몇 %" 를 적어 제안합니다. 수락하면 그 자리에서 내 전용 링크가 나오고, 그 링크로 팔린 건마다 그 %가 쌓입니다. 상한이 없고, 유어딜이 중간에서 떼지 않습니다. 제안에 콘텐츠 조건이나 기간이 붙으면 그 조건을 지킨 건에만 붙습니다.</a:t>
+              <a:t>대행사(중개사)가 보낸 링크를 탭하면 가입과 동시에 매장과 매칭됩니다. 마이페이지에 생기는 매장 링크로 팔린 건마다 등록 때 정한 소개비 %가 쌓입니다. 상한이 없고 유어딜이 떼지 않습니다. 이용권이 바뀌어도 링크는 그대로입니다.</a:t>
             </a:r>
             <a:endParaRPr lang="en-US" sz="1050" dirty="0"/>
           </a:p>
@@ -25186,7 +25636,7 @@
                 <a:ea typeface="Pretendard" pitchFamily="34" charset="-122"/>
                 <a:cs typeface="Pretendard" pitchFamily="34" charset="-120"/>
               </a:rPr>
-              <a:t>매장이 딜마다 제안</a:t>
+              <a:t>매장 등록 때 정한 %</a:t>
             </a:r>
             <a:endParaRPr lang="en-US" sz="1200" dirty="0"/>
           </a:p>
@@ -25225,7 +25675,7 @@
                 <a:ea typeface="Pretendard" pitchFamily="34" charset="-122"/>
                 <a:cs typeface="Pretendard" pitchFamily="34" charset="-120"/>
               </a:rPr>
-              <a:t>상한</a:t>
+              <a:t>매칭</a:t>
             </a:r>
             <a:endParaRPr lang="en-US" sz="1150" dirty="0"/>
           </a:p>
@@ -25264,7 +25714,7 @@
                 <a:ea typeface="Pretendard" pitchFamily="34" charset="-122"/>
                 <a:cs typeface="Pretendard" pitchFamily="34" charset="-120"/>
               </a:rPr>
-              <a:t>없음</a:t>
+              <a:t>링크 한 탭, 또는 코드 입력</a:t>
             </a:r>
             <a:endParaRPr lang="en-US" sz="1200" dirty="0"/>
           </a:p>
@@ -25425,7 +25875,7 @@
                 <a:ea typeface="Pretendard" pitchFamily="34" charset="-122"/>
                 <a:cs typeface="Pretendard" pitchFamily="34" charset="-120"/>
               </a:rPr>
-              <a:t>그 매장 판매가 × 매장과 정한 %</a:t>
+              <a:t>그 매장 판매가 × 등록 때 정한 중개사 몫 %</a:t>
             </a:r>
             <a:endParaRPr lang="en-US" sz="1100" dirty="0"/>
           </a:p>
@@ -25467,7 +25917,7 @@
                 <a:ea typeface="Pretendard" pitchFamily="34" charset="-122"/>
                 <a:cs typeface="Pretendard" pitchFamily="34" charset="-120"/>
               </a:rPr>
-              <a:t>중개사 계정으로 내가 아는 가게를 등록하면, 그 매장은 유어딜 수수료 5%로 시작합니다. 소개비 %는 사장님과 정해 딜로 걸고, 내 링크와 유어샵으로 팔린 건마다 그 %가 쌓입니다. 매장 섭외를 이어갈수록 딜과 이용권이 늘어납니다.</a:t>
+              <a:t>중개사 계정으로 아는 가게를 등록하면 매장 코드가 생기고, 그때 중개사 몫 %와 소개비 %를 정합니다. 사장님은 그 코드로 가입해 주인이 되고 나는 운영자로 남습니다. 팔린 건마다 중개사 몫이 쌓여 유어딜이 직접 보냅니다.</a:t>
             </a:r>
             <a:endParaRPr lang="en-US" sz="1050" dirty="0"/>
           </a:p>
@@ -25584,7 +26034,7 @@
                 <a:ea typeface="Pretendard" pitchFamily="34" charset="-122"/>
                 <a:cs typeface="Pretendard" pitchFamily="34" charset="-120"/>
               </a:rPr>
-              <a:t>소개비</a:t>
+              <a:t>중개사 몫</a:t>
             </a:r>
             <a:endParaRPr lang="en-US" sz="1150" dirty="0"/>
           </a:p>
@@ -25623,7 +26073,7 @@
                 <a:ea typeface="Pretendard" pitchFamily="34" charset="-122"/>
                 <a:cs typeface="Pretendard" pitchFamily="34" charset="-120"/>
               </a:rPr>
-              <a:t>사장님과 정한 %</a:t>
+              <a:t>등록 때 정한 %, 유어딜이 송금</a:t>
             </a:r>
             <a:endParaRPr lang="en-US" sz="1200" dirty="0"/>
           </a:p>
@@ -25809,7 +26259,7 @@
                 <a:ea typeface="Pretendard" pitchFamily="34" charset="-122"/>
                 <a:cs typeface="Pretendard" pitchFamily="34" charset="-120"/>
               </a:rPr>
-              <a:t>나의 팔로워들이 매장 사장님들에게 수익을 가져다줄 수 있도록 힘써주세요. 팔린 만큼 사장님도 나도 버는 구조라, 실적이 보이는 사람에게 매장은 다시 제안합니다.</a:t>
+              <a:t>나의 팔로워들이 매장 사장님들에게 수익을 가져다줄 수 있도록 힘써주세요. 팔린 만큼 사장님도 나도 버는 구조라, 실적이 보이는 사람에게 대행사는 다음 매장의 링크를 먼저 보냅니다.</a:t>
             </a:r>
             <a:endParaRPr lang="en-US" sz="1050" dirty="0"/>
           </a:p>

--- a/docs/business/proposals/urdeal-influencer-deck.pptx
+++ b/docs/business/proposals/urdeal-influencer-deck.pptx
@@ -873,7 +873,7 @@
           <a:p>
             <a:r>
               <a:rPr lang="en-US" dirty="0"/>
-              <a:t>09-19 대표 확정 플로우 7·8·9 단계(docs/decisions/2026-09-19-broker-matching-flow.md): 코드 링크 탭 → 가입 즉시 매칭 · 마이페이지 코드 입력은 직접 온 사람용 · 매장 단위 고유 링크(복사·카톡 공유, 이용권 바뀌어도 그대로). 🚧 코드 미착수 — 그래서 이 장은 화면 대신 카드. 열리면 마이페이지 캡처로 교체.</a:t>
+              <a:t>09-19 대표 확정 플로우 7·8·9 단계 — PR #1499 구현: /i/join/:code(미리보기 → 카카오 로그인 → 자동 입력) · /influencer/settlement 코드 입력(DealsAndCodesSection) · 매장 링크 /s/{id}?ref=(7일 귀속) + 복사·공유. 이 장은 아직 카드 — 배포 후 /i/join 과 마이페이지를 캡처해 교체할 것.</a:t>
             </a:r>
             <a:endParaRPr lang="en-US" dirty="0"/>
           </a:p>
@@ -961,7 +961,7 @@
           <a:p>
             <a:r>
               <a:rPr lang="en-US" dirty="0"/>
-              <a:t>09-19 대표 확정 플로우 2·4·5 단계: 매장 등록 때 코드 자동 생성 + 두 요율 · 사장님이 가입하며 코드 입력 → owner(등록증 확인 그대로, 첫 정산 전까지만, 판매 안 막음) · 대행사 = operator. 라이브: /store/new "중개·대행사에요"(brokered → 5%) + seller_operators. 🚧 코드·요율 입력은 미착수.</a:t>
+              <a:t>09-19 대표 확정 플로우 2·4·5 단계 — PR #1499 구현: StoreRegisterModal 두 요율(중개사 몫 0~50 · 인플루언서 상한 0~50 · 합 ≤ 90) + owner_claim 코드 자동 발급 · /store/find?code= 로 사장님이 찾아 신청(등록증·어드민 승인 그대로) · 대행사 = operator.</a:t>
             </a:r>
             <a:endParaRPr lang="en-US" dirty="0"/>
           </a:p>
@@ -1401,7 +1401,7 @@
           <a:p>
             <a:r>
               <a:rPr lang="en-US" dirty="0"/>
-              <a:t>09-15 참고 덱 "광고 집행 절차" 장치. 09-19 v4: 두 경로를 대표 확정 플로우(코드 링크 · 매장 코드 · 두 요율)로. 사실: influencer-payout.ts(매월 1일 · 10만원 · 딜 하한 없음 · 이월). 🚧 코드 링크·매장 코드는 미착수.</a:t>
+              <a:t>09-15 참고 덱 "광고 집행 절차" 장치. 09-19 v4: 두 경로를 대표 확정 플로우(코드 링크 · 매장 코드 · 두 요율)로 — PR #1499 구현. 사실: influencer-payout.ts(매월 1일 · 10만원 · 딜 하한 없음 · 이월).</a:t>
             </a:r>
             <a:endParaRPr lang="en-US" dirty="0"/>
           </a:p>
@@ -2105,7 +2105,7 @@
           <a:p>
             <a:r>
               <a:rPr lang="en-US" dirty="0"/>
-              <a:t>직접 10% / 중개 5%: fee-resolver.ts. 카드 수수료(약 2.75%)는 이 덱에서 말하지 않는다(09-19 대표). 소개비 %: 매장 등록 때 정함(09-19 확정 플로우, 코드 미착수). 영입 2% 제거(09-19).</a:t>
+              <a:t>직접 10% / 중개 5%: fee-resolver.ts. 카드 수수료(약 2.75%)는 이 덱에서 말하지 않는다(09-19 대표). 소개비 %: 협업 코드 기본값(store-codes.ts) + 딜별 조정(collab-codes.ts PATCH), 상한 = influencer_pct_cap — PR #1499. 영입 2% 제거(09-19).</a:t>
             </a:r>
             <a:endParaRPr lang="en-US" dirty="0"/>
           </a:p>
@@ -2193,7 +2193,7 @@
           <a:p>
             <a:r>
               <a:rPr lang="en-US" dirty="0"/>
-              <a:t>09-19 확정 플로우(docs/decisions/2026-09-19-broker-matching-flow.md): 코드 링크 한 탭 매칭 · 매장 단위 링크 · 두 요율은 매장 등록 때 · 중개사 몫은 유어딜 직접 송금(09-16). 🚧 코드 미착수 — 라이브는 아직 influencer-deals(제안·수락) + /store/new 중개 등록. 영입 2% 열은 09-19 폐지.</a:t>
+              <a:t>09-19 확정 플로우 — PR #1499 구현: 협업 코드(기본 % · 승인 옵션) → /i/join/:code 또는 마이페이지 입력 → seller_influencer_deals 활성 · 매장 링크 /s/{id}?ref= · 두 요율(broker_share_pct · influencer_pct_cap)은 매장 등록 때 · 중개사 몫 적립 broker-share.ts 는 게이트 broker_share_enabled OFF(S-BROKER 뒤 대표가 켠다). 영입 2% 열은 09-19 폐지.</a:t>
             </a:r>
             <a:endParaRPr lang="en-US" dirty="0"/>
           </a:p>
@@ -3350,7 +3350,7 @@
                 <a:ea typeface="Pretendard" pitchFamily="34" charset="-122"/>
                 <a:cs typeface="Pretendard" pitchFamily="34" charset="-120"/>
               </a:rPr>
-              <a:t>매장 등록 때 정한 소개비 12%</a:t>
+              <a:t>협업 코드의 소개비 12%</a:t>
             </a:r>
             <a:endParaRPr lang="en-US" sz="1150" dirty="0"/>
           </a:p>
@@ -7121,7 +7121,7 @@
                 <a:ea typeface="Pretendard" pitchFamily="34" charset="-122"/>
                 <a:cs typeface="Pretendard" pitchFamily="34" charset="-120"/>
               </a:rPr>
-              <a:t>마이페이지에서 매장별 주문과 대기, 확정 금액을 봅니다. 소개비 %는 매장 등록 때 정해진 값이라 물어볼 일이 없습니다.</a:t>
+              <a:t>마이페이지에서 매장별 주문과 대기, 확정 금액을 봅니다. 소개비 %는 코드에 실려 있고, 매장과 조정하면 이후 판매분부터 바뀝니다.</a:t>
             </a:r>
             <a:endParaRPr lang="en-US" sz="1050" dirty="0"/>
           </a:p>
@@ -7557,7 +7557,7 @@
                 <a:ea typeface="Pretendard" pitchFamily="34" charset="-122"/>
                 <a:cs typeface="Pretendard" pitchFamily="34" charset="-120"/>
               </a:rPr>
-              <a:t>링크 안의 매장 코드로 그 매장과 바로 연결됩니다. 신청도 승인 대기도 없습니다.</a:t>
+              <a:t>링크 안의 코드로 그 매장과 연결됩니다. 승인 조건이 없는 코드면 그 자리에서 활성입니다.</a:t>
             </a:r>
             <a:endParaRPr lang="en-US" sz="980" dirty="0"/>
           </a:p>
@@ -8582,7 +8582,7 @@
                 <a:ea typeface="Pretendard" pitchFamily="34" charset="-122"/>
                 <a:cs typeface="Pretendard" pitchFamily="34" charset="-120"/>
               </a:rPr>
-              <a:t>셀러 대시보드의 매장 등록에서 "중개·대행사에요" 를 고르면 매장 코드가 자동으로 생기고, 중개사 몫 %와 인플루언서 소개비 %를 함께 정합니다. 사장님이 가입하며 그 코드를 넣으면 매장 주인이 되고, 나는 운영자로 남습니다. 등록증 확인은 그대로입니다.</a:t>
+              <a:t>셀러 대시보드의 매장 등록에서 "중개·대행사에요" 를 고르면 매장 코드가 자동으로 생기고, 중개사 몫 %와 인플루언서 상한 %를 함께 정합니다. 사장님이 가입하며 그 코드를 넣으면 매장 주인이 되고, 나는 운영자로 남습니다. 등록증 확인은 그대로입니다.</a:t>
             </a:r>
             <a:endParaRPr lang="en-US" sz="1050" dirty="0"/>
           </a:p>
@@ -9095,7 +9095,7 @@
                 <a:ea typeface="Pretendard" pitchFamily="34" charset="-122"/>
                 <a:cs typeface="Pretendard" pitchFamily="34" charset="-120"/>
               </a:rPr>
-              <a:t>중개사 몫 %와 소개비 %를 등록하며 정합니다. 둘 다 유어딜이 직접 보냅니다.</a:t>
+              <a:t>중개사 몫 %와 인플루언서 상한 %를 등록하며 정합니다. 개별 소개비는 협업 코드로.</a:t>
             </a:r>
             <a:endParaRPr lang="en-US" sz="950" dirty="0"/>
           </a:p>
@@ -15920,7 +15920,7 @@
                 <a:ea typeface="Pretendard" pitchFamily="34" charset="-122"/>
                 <a:cs typeface="Pretendard" pitchFamily="34" charset="-120"/>
               </a:rPr>
-              <a:t>소개비 %는 매장 등록 때 정해진 값</a:t>
+              <a:t>소개비 %는 코드의 값, 딜마다 조정 가능</a:t>
             </a:r>
             <a:endParaRPr lang="en-US" sz="950" dirty="0"/>
           </a:p>
@@ -16338,7 +16338,7 @@
                 <a:ea typeface="Pretendard" pitchFamily="34" charset="-122"/>
                 <a:cs typeface="Pretendard" pitchFamily="34" charset="-120"/>
               </a:rPr>
-              <a:t>중개사 몫 %와 소개비 %를 그때 정한다</a:t>
+              <a:t>중개사 몫 %와 인플루언서 상한 %를 그때 정한다</a:t>
             </a:r>
             <a:endParaRPr lang="en-US" sz="1030" dirty="0"/>
           </a:p>
@@ -17881,7 +17881,7 @@
                 <a:ea typeface="Pretendard" pitchFamily="34" charset="-122"/>
                 <a:cs typeface="Pretendard" pitchFamily="34" charset="-120"/>
               </a:rPr>
-              <a:t>판매가 기준, 매장 등록 때 정한 값</a:t>
+              <a:t>판매가 기준, 협업 코드에 실린 값</a:t>
             </a:r>
             <a:endParaRPr lang="en-US" sz="1000" dirty="0"/>
           </a:p>
@@ -23038,7 +23038,7 @@
                 <a:ea typeface="Pretendard" pitchFamily="34" charset="-122"/>
                 <a:cs typeface="Pretendard" pitchFamily="34" charset="-120"/>
               </a:rPr>
-              <a:t>중개사 몫 %와 소개비 %는 등록 때 정하고, 사장님은 매장 코드로 가입해 주인이 됩니다</a:t>
+              <a:t>중개사 몫 %와 인플루언서 상한 %는 등록 때 정하고, 사장님은 매장 코드로 가입해 주인이 됩니다</a:t>
             </a:r>
             <a:endParaRPr lang="en-US" sz="1050" dirty="0"/>
           </a:p>
@@ -24792,7 +24792,7 @@
                 <a:ea typeface="Pretendard" pitchFamily="34" charset="-122"/>
                 <a:cs typeface="Pretendard" pitchFamily="34" charset="-120"/>
               </a:rPr>
-              <a:t>매장 등록 때 정한 비율.</a:t>
+              <a:t>협업 코드에 실린 비율.</a:t>
             </a:r>
             <a:endParaRPr lang="en-US" sz="950" dirty="0"/>
           </a:p>
@@ -24947,7 +24947,7 @@
                 <a:ea typeface="Pretendard" pitchFamily="34" charset="-122"/>
                 <a:cs typeface="Pretendard" pitchFamily="34" charset="-120"/>
               </a:rPr>
-              <a:t>플랫폼이 정한 고정 요율이 아닙니다. 매장을 등록할 때 정한 비율이 그대로 적립되고, 유어딜이 중간에서 깎지 않습니다.</a:t>
+              <a:t>플랫폼이 정한 고정 요율이 아닙니다. 협업 코드에 실린 비율이 그대로 적립되고, 매장과 조정하면 이후 판매분부터 바뀝니다. 유어딜이 중간에서 깎지 않습니다.</a:t>
             </a:r>
             <a:endParaRPr lang="en-US" sz="950" dirty="0"/>
           </a:p>
@@ -25438,7 +25438,7 @@
                 <a:ea typeface="Pretendard" pitchFamily="34" charset="-122"/>
                 <a:cs typeface="Pretendard" pitchFamily="34" charset="-120"/>
               </a:rPr>
-              <a:t>결제 금액 × 매장 등록 때 정한 %</a:t>
+              <a:t>결제 금액 × 협업 코드의 %</a:t>
             </a:r>
             <a:endParaRPr lang="en-US" sz="1100" dirty="0"/>
           </a:p>
@@ -25480,7 +25480,7 @@
                 <a:ea typeface="Pretendard" pitchFamily="34" charset="-122"/>
                 <a:cs typeface="Pretendard" pitchFamily="34" charset="-120"/>
               </a:rPr>
-              <a:t>대행사(중개사)가 보낸 링크를 탭하면 가입과 동시에 매장과 매칭됩니다. 마이페이지에 생기는 매장 링크로 팔린 건마다 등록 때 정한 소개비 %가 쌓입니다. 상한이 없고 유어딜이 떼지 않습니다. 이용권이 바뀌어도 링크는 그대로입니다.</a:t>
+              <a:t>대행사(중개사)가 보낸 링크를 탭하면 가입과 동시에 매장과 매칭됩니다. 마이페이지에 생기는 매장 링크로 팔린 건마다 코드에 실린 소개비 %가 쌓입니다. %는 매장과 조정할 수 있고, 유어딜이 떼지 않습니다. 이용권이 바뀌어도 링크는 그대로입니다.</a:t>
             </a:r>
             <a:endParaRPr lang="en-US" sz="1050" dirty="0"/>
           </a:p>
@@ -25636,7 +25636,7 @@
                 <a:ea typeface="Pretendard" pitchFamily="34" charset="-122"/>
                 <a:cs typeface="Pretendard" pitchFamily="34" charset="-120"/>
               </a:rPr>
-              <a:t>매장 등록 때 정한 %</a:t>
+              <a:t>코드 기본 %, 딜마다 조정 가능</a:t>
             </a:r>
             <a:endParaRPr lang="en-US" sz="1200" dirty="0"/>
           </a:p>
@@ -25917,7 +25917,7 @@
                 <a:ea typeface="Pretendard" pitchFamily="34" charset="-122"/>
                 <a:cs typeface="Pretendard" pitchFamily="34" charset="-120"/>
               </a:rPr>
-              <a:t>중개사 계정으로 아는 가게를 등록하면 매장 코드가 생기고, 그때 중개사 몫 %와 소개비 %를 정합니다. 사장님은 그 코드로 가입해 주인이 되고 나는 운영자로 남습니다. 팔린 건마다 중개사 몫이 쌓여 유어딜이 직접 보냅니다.</a:t>
+              <a:t>중개사 계정으로 아는 가게를 등록하면 매장 코드가 생기고, 그때 중개사 몫 %와 인플루언서 상한 %를 정합니다. 사장님은 그 코드로 가입해 주인이 되고 나는 운영자로 남습니다. 팔린 건마다 중개사 몫이 쌓여 유어딜이 직접 보냅니다.</a:t>
             </a:r>
             <a:endParaRPr lang="en-US" sz="1050" dirty="0"/>
           </a:p>

--- a/docs/business/proposals/urdeal-influencer-deck.pptx
+++ b/docs/business/proposals/urdeal-influencer-deck.pptx
@@ -609,7 +609,7 @@
           <a:p>
             <a:r>
               <a:rPr lang="en-US" dirty="0"/>
-              <a:t>상품 2888 실측 16,500원. 16,500×42=693,000 · ×12%=83,160. 원천징수(tax-withholding.ts 3.3/8.8)는 "차감 별도" 한 줄만(09-19 대표). ⚠️ 코드의 인플루언서 소개비 확정은 available_at=결제+7일(helpers.ts) — 덱은 대표 지시대로 "이용권 사용 뒤" 로 말한다. 코드와 문구가 다르므로 대표 확인 필요.</a:t>
+              <a:t>⚠️ 이 42건 예시의 16,500원은 상품 2888 기준이고, 그 상품은 2026-10-06 실측에서 is_active=0 다 — 라이브에서 지금 팔리는 실제 매장 이용권은 2915(14,500 → 7,500 · FACTS.sample*). 이 장은 "지금 팔린다" 고 말하지 않는 예시 시나리오라 대표 승인본의 숫자를 유지했다. 바꾸면 42건 금액·소개비가 함께 바뀌므로 대표 판단. 16,500×42=693,000 · ×12%=83,160. 원천징수(tax-withholding.ts 3.3/8.8)는 "차감 별도" 한 줄만(09-19 대표). ⚠️ 코드의 인플루언서 소개비 확정은 available_at=결제+7일(helpers.ts) — 덱은 대표 지시대로 "이용권 사용 뒤" 로 말한다. 코드와 문구가 다르므로 대표 확인 필요.</a:t>
             </a:r>
             <a:endParaRPr lang="en-US" dirty="0"/>
           </a:p>
@@ -2622,7 +2622,7 @@
         <p:spPr>
           <a:xfrm>
             <a:off x="649224" y="2240280"/>
-            <a:ext cx="5120640" cy="1406769"/>
+            <a:ext cx="5120640" cy="1286564"/>
           </a:xfrm>
           <a:prstGeom prst="rect">
             <a:avLst/>
@@ -2637,7 +2637,7 @@
         </p:nvSpPr>
         <p:spPr>
           <a:xfrm>
-            <a:off x="685800" y="4058529"/>
+            <a:off x="685800" y="3938324"/>
             <a:ext cx="8229600" cy="502920"/>
           </a:xfrm>
           <a:prstGeom prst="rect">
@@ -2676,7 +2676,7 @@
         </p:nvSpPr>
         <p:spPr>
           <a:xfrm>
-            <a:off x="685800" y="4607169"/>
+            <a:off x="685800" y="4486964"/>
             <a:ext cx="7772400" cy="457200"/>
           </a:xfrm>
           <a:prstGeom prst="rect">
@@ -2899,7 +2899,7 @@
         <p:spPr>
           <a:xfrm>
             <a:off x="685800" y="457200"/>
-            <a:ext cx="867066" cy="237744"/>
+            <a:ext cx="943138" cy="237744"/>
           </a:xfrm>
           <a:prstGeom prst="rect">
             <a:avLst/>
@@ -4209,7 +4209,7 @@
         <p:spPr>
           <a:xfrm>
             <a:off x="685800" y="457200"/>
-            <a:ext cx="867066" cy="237744"/>
+            <a:ext cx="943138" cy="237744"/>
           </a:xfrm>
           <a:prstGeom prst="rect">
             <a:avLst/>
@@ -5692,7 +5692,7 @@
         <p:spPr>
           <a:xfrm>
             <a:off x="685800" y="457200"/>
-            <a:ext cx="867066" cy="237744"/>
+            <a:ext cx="943138" cy="237744"/>
           </a:xfrm>
           <a:prstGeom prst="rect">
             <a:avLst/>
@@ -6339,7 +6339,7 @@
         <p:spPr>
           <a:xfrm>
             <a:off x="685800" y="457200"/>
-            <a:ext cx="867066" cy="237744"/>
+            <a:ext cx="943138" cy="237744"/>
           </a:xfrm>
           <a:prstGeom prst="rect">
             <a:avLst/>
@@ -7822,7 +7822,7 @@
         <p:spPr>
           <a:xfrm>
             <a:off x="685800" y="457200"/>
-            <a:ext cx="867066" cy="237744"/>
+            <a:ext cx="943138" cy="237744"/>
           </a:xfrm>
           <a:prstGeom prst="rect">
             <a:avLst/>
@@ -9312,7 +9312,7 @@
         <p:spPr>
           <a:xfrm>
             <a:off x="685800" y="457200"/>
-            <a:ext cx="867066" cy="237744"/>
+            <a:ext cx="943138" cy="237744"/>
           </a:xfrm>
           <a:prstGeom prst="rect">
             <a:avLst/>
@@ -10577,7 +10577,7 @@
         <p:spPr>
           <a:xfrm>
             <a:off x="685800" y="457200"/>
-            <a:ext cx="867066" cy="237744"/>
+            <a:ext cx="943138" cy="237744"/>
           </a:xfrm>
           <a:prstGeom prst="rect">
             <a:avLst/>
@@ -12906,7 +12906,7 @@
         <p:spPr>
           <a:xfrm>
             <a:off x="685800" y="457200"/>
-            <a:ext cx="867066" cy="237744"/>
+            <a:ext cx="943138" cy="237744"/>
           </a:xfrm>
           <a:prstGeom prst="rect">
             <a:avLst/>
@@ -13970,7 +13970,7 @@
         <p:spPr>
           <a:xfrm>
             <a:off x="685800" y="457200"/>
-            <a:ext cx="867066" cy="237744"/>
+            <a:ext cx="943138" cy="237744"/>
           </a:xfrm>
           <a:prstGeom prst="rect">
             <a:avLst/>
@@ -14917,7 +14917,7 @@
         <p:spPr>
           <a:xfrm>
             <a:off x="685800" y="457200"/>
-            <a:ext cx="867066" cy="237744"/>
+            <a:ext cx="943138" cy="237744"/>
           </a:xfrm>
           <a:prstGeom prst="rect">
             <a:avLst/>
@@ -17577,7 +17577,7 @@
         <p:spPr>
           <a:xfrm>
             <a:off x="685800" y="457200"/>
-            <a:ext cx="867066" cy="237744"/>
+            <a:ext cx="943138" cy="237744"/>
           </a:xfrm>
           <a:prstGeom prst="rect">
             <a:avLst/>
@@ -18235,7 +18235,7 @@
         <p:spPr>
           <a:xfrm>
             <a:off x="685800" y="457200"/>
-            <a:ext cx="867066" cy="237744"/>
+            <a:ext cx="943138" cy="237744"/>
           </a:xfrm>
           <a:prstGeom prst="rect">
             <a:avLst/>
@@ -19380,7 +19380,7 @@
         <p:spPr>
           <a:xfrm>
             <a:off x="685800" y="457200"/>
-            <a:ext cx="867066" cy="237744"/>
+            <a:ext cx="943138" cy="237744"/>
           </a:xfrm>
           <a:prstGeom prst="rect">
             <a:avLst/>
@@ -19871,7 +19871,7 @@
         <p:spPr>
           <a:xfrm>
             <a:off x="685800" y="457200"/>
-            <a:ext cx="867066" cy="237744"/>
+            <a:ext cx="943138" cy="237744"/>
           </a:xfrm>
           <a:prstGeom prst="rect">
             <a:avLst/>
@@ -20731,7 +20731,7 @@
         <p:spPr>
           <a:xfrm>
             <a:off x="685800" y="457200"/>
-            <a:ext cx="867066" cy="237744"/>
+            <a:ext cx="943138" cy="237744"/>
           </a:xfrm>
           <a:prstGeom prst="rect">
             <a:avLst/>
@@ -21496,7 +21496,7 @@
         <p:spPr>
           <a:xfrm>
             <a:off x="685800" y="457200"/>
-            <a:ext cx="867066" cy="237744"/>
+            <a:ext cx="943138" cy="237744"/>
           </a:xfrm>
           <a:prstGeom prst="rect">
             <a:avLst/>
@@ -23093,7 +23093,7 @@
         <p:spPr>
           <a:xfrm>
             <a:off x="685800" y="457200"/>
-            <a:ext cx="867066" cy="237744"/>
+            <a:ext cx="943138" cy="237744"/>
           </a:xfrm>
           <a:prstGeom prst="rect">
             <a:avLst/>
@@ -23662,7 +23662,7 @@
         <p:spPr>
           <a:xfrm>
             <a:off x="685800" y="457200"/>
-            <a:ext cx="867066" cy="237744"/>
+            <a:ext cx="943138" cy="237744"/>
           </a:xfrm>
           <a:prstGeom prst="rect">
             <a:avLst/>
@@ -25117,7 +25117,7 @@
         <p:spPr>
           <a:xfrm>
             <a:off x="685800" y="457200"/>
-            <a:ext cx="867066" cy="237744"/>
+            <a:ext cx="943138" cy="237744"/>
           </a:xfrm>
           <a:prstGeom prst="rect">
             <a:avLst/>

--- a/docs/business/proposals/urdeal-influencer-deck.pptx
+++ b/docs/business/proposals/urdeal-influencer-deck.pptx
@@ -609,7 +609,7 @@
           <a:p>
             <a:r>
               <a:rPr lang="en-US" dirty="0"/>
-              <a:t>⚠️ 이 42건 예시의 16,500원은 상품 2888 기준이고, 그 상품은 2026-10-06 실측에서 is_active=0 다 — 라이브에서 지금 팔리는 실제 매장 이용권은 2915(14,500 → 7,500 · FACTS.sample*). 이 장은 "지금 팔린다" 고 말하지 않는 예시 시나리오라 대표 승인본의 숫자를 유지했다. 바꾸면 42건 금액·소개비가 함께 바뀌므로 대표 판단. 16,500×42=693,000 · ×12%=83,160. 원천징수(tax-withholding.ts 3.3/8.8)는 "차감 별도" 한 줄만(09-19 대표). ⚠️ 코드의 인플루언서 소개비 확정은 available_at=결제+7일(helpers.ts) — 덱은 대표 지시대로 "이용권 사용 뒤" 로 말한다. 코드와 문구가 다르므로 대표 확인 필요.</a:t>
+              <a:t>셈법은 라이브 식사 이용권 **평균 판매가**(FACTS.avgNums.meal = 32,521원, 2026-10-12 D1 실측 — 활성 voucher 4종의 판매가 평균)에 걸었다. 42건·12% 는 대표 승인본 그대로이고 금액은 코드가 계산한다(42×32,521=1,365,882 · ×12%=163,906). 🩸 종전엔 상품 2888(치즈돈가스 16,500원) 시나리오였는데 그 상품이 is_active=0 이 되어 **없는 상품으로 돈을 세고 있었다** — 시나리오가 묻는 것은 건수이지 상품이 아니므로 평균으로 옮겼다(평균은 내려가지 않는다). 원천징수(tax-withholding.ts 3.3/8.8)는 "차감 별도" 한 줄만(09-19 대표). ✅ 오른쪽 네 번째 점의 "이용권을 사용한 뒤 정산" 은 2026-10-12 실측에서 **코드와 일치한다** — payout_requires_voucher_use=true 가 라이브이고 cron/influencer-payout.ts 의 성숙 게이트가 그것이다(종전 노트의 "코드와 문구가 다르므로 대표 확인 필요" 는 해소됐다. 무기한 이용권은 천장 payout_unused_max_wait_days 기본 180일로 풀린다).</a:t>
             </a:r>
             <a:endParaRPr lang="en-US" dirty="0"/>
           </a:p>
@@ -3132,7 +3132,7 @@
                 <a:ea typeface="Pretendard" pitchFamily="34" charset="-122"/>
                 <a:cs typeface="Pretendard" pitchFamily="34" charset="-120"/>
               </a:rPr>
-              <a:t>가정: 치즈돈가스 2인 세트 이용권을 한 달에 42건 팔았다</a:t>
+              <a:t>가정: 식사 이용권을 한 달에 42건 팔았다</a:t>
             </a:r>
             <a:endParaRPr lang="en-US" sz="1000" dirty="0"/>
           </a:p>
@@ -3171,7 +3171,7 @@
                 <a:ea typeface="Pretendard" pitchFamily="34" charset="-122"/>
                 <a:cs typeface="Pretendard" pitchFamily="34" charset="-120"/>
               </a:rPr>
-              <a:t>이용권 판매가 (정가 25,000원의 34% 할인)</a:t>
+              <a:t>이용권 판매가 (라이브 식사 이용권 평균)</a:t>
             </a:r>
             <a:endParaRPr lang="en-US" sz="1150" dirty="0"/>
           </a:p>
@@ -3210,7 +3210,7 @@
                 <a:ea typeface="Pretendard" pitchFamily="34" charset="-122"/>
                 <a:cs typeface="Pretendard" pitchFamily="34" charset="-120"/>
               </a:rPr>
-              <a:t>16,500원</a:t>
+              <a:t>32,521원</a:t>
             </a:r>
             <a:endParaRPr lang="en-US" sz="1200" dirty="0"/>
           </a:p>
@@ -3288,7 +3288,7 @@
                 <a:ea typeface="Pretendard" pitchFamily="34" charset="-122"/>
                 <a:cs typeface="Pretendard" pitchFamily="34" charset="-120"/>
               </a:rPr>
-              <a:t>693,000원</a:t>
+              <a:t>1,365,882원</a:t>
             </a:r>
             <a:endParaRPr lang="en-US" sz="1200" dirty="0"/>
           </a:p>
@@ -3490,7 +3490,7 @@
                 <a:ea typeface="Pretendard" pitchFamily="34" charset="-122"/>
                 <a:cs typeface="Pretendard" pitchFamily="34" charset="-120"/>
               </a:rPr>
-              <a:t>83,160원</a:t>
+              <a:t>163,906원</a:t>
             </a:r>
             <a:endParaRPr lang="en-US" sz="1200" dirty="0"/>
           </a:p>
@@ -3556,7 +3556,7 @@
                 <a:ea typeface="Pretendard" pitchFamily="34" charset="-122"/>
                 <a:cs typeface="Pretendard" pitchFamily="34" charset="-120"/>
               </a:rPr>
-              <a:t>83,160원</a:t>
+              <a:t>163,906원</a:t>
             </a:r>
             <a:endParaRPr lang="en-US" sz="2600" dirty="0"/>
           </a:p>
